--- a/docs/thinkstruct-deck.pptx
+++ b/docs/thinkstruct-deck.pptx
@@ -4743,7 +4743,7 @@
         <p:spPr>
           <a:xfrm>
             <a:off x="777240" y="2231136"/>
-            <a:ext cx="10058400" cy="548640"/>
+            <a:ext cx="9509760" cy="822960"/>
           </a:xfrm>
           <a:prstGeom prst="rect">
             <a:avLst/>
@@ -4758,7 +4758,7 @@
           <a:p>
             <a:pPr>
               <a:lnSpc>
-                <a:spcPct val="135000"/>
+                <a:spcPct val="140000"/>
               </a:lnSpc>
               <a:spcBef>
                 <a:spcPts val="0"/>
@@ -4768,25 +4768,16 @@
               </a:spcAft>
             </a:pPr>
             <a:r>
-              <a:rPr sz="1350" b="0">
-                <a:solidFill>
-                  <a:srgbClr val="35424F"/>
+              <a:rPr sz="1700" b="1">
+                <a:solidFill>
+                  <a:srgbClr val="131A24"/>
                 </a:solidFill>
                 <a:latin typeface="Calibri"/>
               </a:rPr>
-              <a:t>Before filing, litigating or committing R&amp;D budget someone must answer: </a:t>
-            </a:r>
-            <a:r>
-              <a:rPr sz="1350" b="1">
-                <a:solidFill>
-                  <a:srgbClr val="131A24"/>
-                </a:solidFill>
-                <a:latin typeface="Calibri"/>
-              </a:rPr>
-              <a:t>has anyone already claimed this?</a:t>
-            </a:r>
-            <a:r>
-              <a:rPr sz="1350" b="0">
+              <a:t>Prior art rarely uses your vocabulary.</a:t>
+            </a:r>
+            <a:r>
+              <a:rPr sz="1700" b="0">
                 <a:solidFill>
                   <a:srgbClr val="35424F"/>
                 </a:solidFill>
@@ -4795,16 +4786,16 @@
               <a:t>  A </a:t>
             </a:r>
             <a:r>
-              <a:rPr sz="1350" b="1">
-                <a:solidFill>
-                  <a:srgbClr val="131A24"/>
+              <a:rPr sz="1700" b="1">
+                <a:solidFill>
+                  <a:srgbClr val="1C4FD8"/>
                 </a:solidFill>
                 <a:latin typeface="Calibri"/>
               </a:rPr>
               <a:t>carbon fibre spoke</a:t>
             </a:r>
             <a:r>
-              <a:rPr sz="1350" b="0">
+              <a:rPr sz="1700" b="0">
                 <a:solidFill>
                   <a:srgbClr val="35424F"/>
                 </a:solidFill>
@@ -4813,22 +4804,22 @@
               <a:t> may be claimed elsewhere as an </a:t>
             </a:r>
             <a:r>
-              <a:rPr sz="1350" b="1">
-                <a:solidFill>
-                  <a:srgbClr val="131A24"/>
+              <a:rPr sz="1700" b="1">
+                <a:solidFill>
+                  <a:srgbClr val="1C4FD8"/>
                 </a:solidFill>
                 <a:latin typeface="Calibri"/>
               </a:rPr>
               <a:t>elongate composite tension member</a:t>
             </a:r>
             <a:r>
-              <a:rPr sz="1350" b="0">
+              <a:rPr sz="1700" b="0">
                 <a:solidFill>
                   <a:srgbClr val="35424F"/>
                 </a:solidFill>
                 <a:latin typeface="Calibri"/>
               </a:rPr>
-              <a:t> — keyword search misses it, and reading 10M patents is not an option.</a:t>
+              <a:t>.</a:t>
             </a:r>
           </a:p>
         </p:txBody>
@@ -4841,8 +4832,8 @@
         </p:nvSpPr>
         <p:spPr>
           <a:xfrm>
-            <a:off x="777240" y="2980944"/>
-            <a:ext cx="5286603" cy="960120"/>
+            <a:off x="777240" y="3191256"/>
+            <a:ext cx="5263743" cy="914400"/>
           </a:xfrm>
           <a:prstGeom prst="rect">
             <a:avLst/>
@@ -4885,8 +4876,8 @@
         </p:nvSpPr>
         <p:spPr>
           <a:xfrm>
-            <a:off x="777240" y="2980944"/>
-            <a:ext cx="38100" cy="960120"/>
+            <a:off x="777240" y="3191256"/>
+            <a:ext cx="38100" cy="914400"/>
           </a:xfrm>
           <a:prstGeom prst="rect">
             <a:avLst/>
@@ -4929,8 +4920,8 @@
         </p:nvSpPr>
         <p:spPr>
           <a:xfrm>
-            <a:off x="923544" y="3090672"/>
-            <a:ext cx="5012283" cy="777240"/>
+            <a:off x="923544" y="3300984"/>
+            <a:ext cx="4989423" cy="731520"/>
           </a:xfrm>
           <a:prstGeom prst="rect">
             <a:avLst/>
@@ -4958,7 +4949,7 @@
                 </a:solidFill>
                 <a:latin typeface="Calibri"/>
               </a:rPr>
-              <a:t>Missing prior art</a:t>
+              <a:t>Miss the prior art</a:t>
             </a:r>
           </a:p>
           <a:p>
@@ -4980,7 +4971,7 @@
                 </a:solidFill>
                 <a:latin typeface="Calibri"/>
               </a:rPr>
-              <a:t>A patent issues that is invalid. It surfaces in litigation, where invalidation runs $1–3M and the R&amp;D is already sunk.</a:t>
+              <a:t>An invalid patent issues. It surfaces in litigation at $1–3M.</a:t>
             </a:r>
           </a:p>
         </p:txBody>
@@ -4993,8 +4984,8 @@
         </p:nvSpPr>
         <p:spPr>
           <a:xfrm>
-            <a:off x="6338163" y="2980944"/>
-            <a:ext cx="5286603" cy="960120"/>
+            <a:off x="6361023" y="3191256"/>
+            <a:ext cx="5263743" cy="914400"/>
           </a:xfrm>
           <a:prstGeom prst="rect">
             <a:avLst/>
@@ -5037,8 +5028,8 @@
         </p:nvSpPr>
         <p:spPr>
           <a:xfrm>
-            <a:off x="6338163" y="2980944"/>
-            <a:ext cx="38100" cy="960120"/>
+            <a:off x="6361023" y="3191256"/>
+            <a:ext cx="38100" cy="914400"/>
           </a:xfrm>
           <a:prstGeom prst="rect">
             <a:avLst/>
@@ -5081,8 +5072,8 @@
         </p:nvSpPr>
         <p:spPr>
           <a:xfrm>
-            <a:off x="6484467" y="3090672"/>
-            <a:ext cx="5012283" cy="777240"/>
+            <a:off x="6507327" y="3300984"/>
+            <a:ext cx="4989423" cy="731520"/>
           </a:xfrm>
           <a:prstGeom prst="rect">
             <a:avLst/>
@@ -5110,7 +5101,7 @@
                 </a:solidFill>
                 <a:latin typeface="Calibri"/>
               </a:rPr>
-              <a:t>Returning noise</a:t>
+              <a:t>Return noise instead</a:t>
             </a:r>
           </a:p>
           <a:p>
@@ -5132,65 +5123,21 @@
                 </a:solidFill>
                 <a:latin typeface="Calibri"/>
               </a:rPr>
-              <a:t>Attorneys read hundreds of irrelevant patents at $400–700/hour. 200 vague hits has saved nobody anything.</a:t>
-            </a:r>
-          </a:p>
-        </p:txBody>
-      </p:sp>
-      <p:sp>
-        <p:nvSpPr>
-          <p:cNvPr id="14" name="Rectangle 13"/>
-          <p:cNvSpPr/>
-          <p:nvPr/>
-        </p:nvSpPr>
-        <p:spPr>
-          <a:xfrm>
-            <a:off x="777240" y="4096512"/>
-            <a:ext cx="10847527" cy="9525"/>
-          </a:xfrm>
-          <a:prstGeom prst="rect">
-            <a:avLst/>
-          </a:prstGeom>
-          <a:solidFill>
-            <a:srgbClr val="D5DBE2"/>
-          </a:solidFill>
-          <a:ln>
-            <a:noFill/>
-          </a:ln>
-          <a:effectLst/>
-        </p:spPr>
-        <p:style>
-          <a:lnRef idx="1">
-            <a:schemeClr val="accent1"/>
-          </a:lnRef>
-          <a:fillRef idx="3">
-            <a:schemeClr val="accent1"/>
-          </a:fillRef>
-          <a:effectRef idx="2">
-            <a:schemeClr val="accent1"/>
-          </a:effectRef>
-          <a:fontRef idx="minor">
-            <a:schemeClr val="lt1"/>
-          </a:fontRef>
-        </p:style>
-        <p:txBody>
-          <a:bodyPr rtlCol="0" anchor="ctr"/>
-          <a:lstStyle/>
-          <a:p>
-            <a:pPr algn="ctr"/>
-          </a:p>
-        </p:txBody>
-      </p:sp>
-      <p:sp>
-        <p:nvSpPr>
-          <p:cNvPr id="15" name="TextBox 14"/>
+              <a:t>Attorneys read irrelevant patents at $400–700 an hour.</a:t>
+            </a:r>
+          </a:p>
+        </p:txBody>
+      </p:sp>
+      <p:sp>
+        <p:nvSpPr>
+          <p:cNvPr id="14" name="TextBox 13"/>
           <p:cNvSpPr txBox="1"/>
           <p:nvPr/>
         </p:nvSpPr>
         <p:spPr>
           <a:xfrm>
-            <a:off x="777240" y="4297680"/>
-            <a:ext cx="10847527" cy="237744"/>
+            <a:off x="777240" y="4562856"/>
+            <a:ext cx="10847527" cy="822960"/>
           </a:xfrm>
           <a:prstGeom prst="rect">
             <a:avLst/>
@@ -5208,75 +5155,53 @@
                 <a:spcPts val="0"/>
               </a:spcBef>
               <a:spcAft>
-                <a:spcPts val="0"/>
+                <a:spcPts val="800"/>
               </a:spcAft>
             </a:pPr>
             <a:r>
-              <a:rPr sz="1000" b="1">
-                <a:solidFill>
-                  <a:srgbClr val="1C4FD8"/>
-                </a:solidFill>
-                <a:latin typeface="Consolas"/>
+              <a:rPr sz="1700" b="1">
+                <a:solidFill>
+                  <a:srgbClr val="131A24"/>
+                </a:solidFill>
+                <a:latin typeface="Calibri"/>
               </a:rPr>
-              <a:t>DESIGN DECISION · RETRIEVAL OPERATES ON CLAIMS, NEVER WHOLE PATENTS</a:t>
-            </a:r>
-          </a:p>
-        </p:txBody>
-      </p:sp>
-      <p:sp>
-        <p:nvSpPr>
-          <p:cNvPr id="16" name="Rectangle 15"/>
-          <p:cNvSpPr/>
-          <p:nvPr/>
-        </p:nvSpPr>
-        <p:spPr>
-          <a:xfrm>
-            <a:off x="777240" y="4663440"/>
-            <a:ext cx="31750" cy="786384"/>
-          </a:xfrm>
-          <a:prstGeom prst="rect">
-            <a:avLst/>
-          </a:prstGeom>
-          <a:solidFill>
-            <a:srgbClr val="1C4FD8"/>
-          </a:solidFill>
-          <a:ln>
-            <a:noFill/>
-          </a:ln>
-          <a:effectLst/>
-        </p:spPr>
-        <p:style>
-          <a:lnRef idx="1">
-            <a:schemeClr val="accent1"/>
-          </a:lnRef>
-          <a:fillRef idx="3">
-            <a:schemeClr val="accent1"/>
-          </a:fillRef>
-          <a:effectRef idx="2">
-            <a:schemeClr val="accent1"/>
-          </a:effectRef>
-          <a:fontRef idx="minor">
-            <a:schemeClr val="lt1"/>
-          </a:fontRef>
-        </p:style>
-        <p:txBody>
-          <a:bodyPr rtlCol="0" anchor="ctr" wrap="square"/>
-          <a:lstStyle/>
-          <a:p>
-            <a:pPr algn="ctr"/>
-          </a:p>
-        </p:txBody>
-      </p:sp>
-      <p:sp>
-        <p:nvSpPr>
-          <p:cNvPr id="17" name="TextBox 16"/>
+              <a:t>Retrieval operates on claims, never whole patents.</a:t>
+            </a:r>
+          </a:p>
+          <a:p>
+            <a:pPr algn="l">
+              <a:lnSpc>
+                <a:spcPct val="135000"/>
+              </a:lnSpc>
+              <a:spcBef>
+                <a:spcPts val="0"/>
+              </a:spcBef>
+              <a:spcAft>
+                <a:spcPts val="0"/>
+              </a:spcAft>
+            </a:pPr>
+            <a:r>
+              <a:rPr sz="1350" b="0">
+                <a:solidFill>
+                  <a:srgbClr val="35424F"/>
+                </a:solidFill>
+                <a:latin typeface="Calibri"/>
+              </a:rPr>
+              <a:t>Claims are the legal unit — infringement is decided claim by claim. Every result names the record that matched.</a:t>
+            </a:r>
+          </a:p>
+        </p:txBody>
+      </p:sp>
+      <p:sp>
+        <p:nvSpPr>
+          <p:cNvPr id="15" name="TextBox 14"/>
           <p:cNvSpPr txBox="1"/>
           <p:nvPr/>
         </p:nvSpPr>
         <p:spPr>
           <a:xfrm>
-            <a:off x="886968" y="4663440"/>
-            <a:ext cx="3323234" cy="786384"/>
+            <a:off x="777240" y="6172200"/>
+            <a:ext cx="10847527" cy="237744"/>
           </a:xfrm>
           <a:prstGeom prst="rect">
             <a:avLst/>
@@ -5294,430 +5219,17 @@
                 <a:spcPts val="0"/>
               </a:spcBef>
               <a:spcAft>
-                <a:spcPts val="200"/>
+                <a:spcPts val="0"/>
               </a:spcAft>
             </a:pPr>
             <a:r>
-              <a:rPr sz="2200" b="1">
-                <a:solidFill>
-                  <a:srgbClr val="131A24"/>
+              <a:rPr sz="1100" b="0">
+                <a:solidFill>
+                  <a:srgbClr val="61707F"/>
                 </a:solidFill>
                 <a:latin typeface="Consolas"/>
               </a:rPr>
-              <a:t>16.5</a:t>
-            </a:r>
-          </a:p>
-          <a:p>
-            <a:pPr algn="l">
-              <a:lnSpc>
-                <a:spcPct val="115000"/>
-              </a:lnSpc>
-              <a:spcBef>
-                <a:spcPts val="0"/>
-              </a:spcBef>
-              <a:spcAft>
-                <a:spcPts val="0"/>
-              </a:spcAft>
-            </a:pPr>
-            <a:r>
-              <a:rPr sz="1000" b="0">
-                <a:solidFill>
-                  <a:srgbClr val="61707F"/>
-                </a:solidFill>
-                <a:latin typeface="Calibri"/>
-              </a:rPr>
-              <a:t>average claims per patent — one blob matches every query in the field</a:t>
-            </a:r>
-          </a:p>
-        </p:txBody>
-      </p:sp>
-      <p:sp>
-        <p:nvSpPr>
-          <p:cNvPr id="18" name="Rectangle 17"/>
-          <p:cNvSpPr/>
-          <p:nvPr/>
-        </p:nvSpPr>
-        <p:spPr>
-          <a:xfrm>
-            <a:off x="4484522" y="4663440"/>
-            <a:ext cx="31750" cy="786384"/>
-          </a:xfrm>
-          <a:prstGeom prst="rect">
-            <a:avLst/>
-          </a:prstGeom>
-          <a:solidFill>
-            <a:srgbClr val="1C4FD8"/>
-          </a:solidFill>
-          <a:ln>
-            <a:noFill/>
-          </a:ln>
-          <a:effectLst/>
-        </p:spPr>
-        <p:style>
-          <a:lnRef idx="1">
-            <a:schemeClr val="accent1"/>
-          </a:lnRef>
-          <a:fillRef idx="3">
-            <a:schemeClr val="accent1"/>
-          </a:fillRef>
-          <a:effectRef idx="2">
-            <a:schemeClr val="accent1"/>
-          </a:effectRef>
-          <a:fontRef idx="minor">
-            <a:schemeClr val="lt1"/>
-          </a:fontRef>
-        </p:style>
-        <p:txBody>
-          <a:bodyPr rtlCol="0" anchor="ctr" wrap="square"/>
-          <a:lstStyle/>
-          <a:p>
-            <a:pPr algn="ctr"/>
-          </a:p>
-        </p:txBody>
-      </p:sp>
-      <p:sp>
-        <p:nvSpPr>
-          <p:cNvPr id="19" name="TextBox 18"/>
-          <p:cNvSpPr txBox="1"/>
-          <p:nvPr/>
-        </p:nvSpPr>
-        <p:spPr>
-          <a:xfrm>
-            <a:off x="4594250" y="4663440"/>
-            <a:ext cx="3323234" cy="786384"/>
-          </a:xfrm>
-          <a:prstGeom prst="rect">
-            <a:avLst/>
-          </a:prstGeom>
-          <a:noFill/>
-        </p:spPr>
-        <p:txBody>
-          <a:bodyPr wrap="square" anchor="t" lIns="0" rIns="0" tIns="0" bIns="0">
-            <a:spAutoFit/>
-          </a:bodyPr>
-          <a:lstStyle/>
-          <a:p>
-            <a:pPr algn="l">
-              <a:spcBef>
-                <a:spcPts val="0"/>
-              </a:spcBef>
-              <a:spcAft>
-                <a:spcPts val="200"/>
-              </a:spcAft>
-            </a:pPr>
-            <a:r>
-              <a:rPr sz="2200" b="1">
-                <a:solidFill>
-                  <a:srgbClr val="131A24"/>
-                </a:solidFill>
-                <a:latin typeface="Consolas"/>
-              </a:rPr>
-              <a:t>Legal</a:t>
-            </a:r>
-          </a:p>
-          <a:p>
-            <a:pPr algn="l">
-              <a:lnSpc>
-                <a:spcPct val="115000"/>
-              </a:lnSpc>
-              <a:spcBef>
-                <a:spcPts val="0"/>
-              </a:spcBef>
-              <a:spcAft>
-                <a:spcPts val="0"/>
-              </a:spcAft>
-            </a:pPr>
-            <a:r>
-              <a:rPr sz="1000" b="0">
-                <a:solidFill>
-                  <a:srgbClr val="61707F"/>
-                </a:solidFill>
-                <a:latin typeface="Calibri"/>
-              </a:rPr>
-              <a:t>infringement is decided claim by claim; “patent X is relevant” is not actionable</a:t>
-            </a:r>
-          </a:p>
-        </p:txBody>
-      </p:sp>
-      <p:sp>
-        <p:nvSpPr>
-          <p:cNvPr id="20" name="Rectangle 19"/>
-          <p:cNvSpPr/>
-          <p:nvPr/>
-        </p:nvSpPr>
-        <p:spPr>
-          <a:xfrm>
-            <a:off x="8191804" y="4663440"/>
-            <a:ext cx="31750" cy="786384"/>
-          </a:xfrm>
-          <a:prstGeom prst="rect">
-            <a:avLst/>
-          </a:prstGeom>
-          <a:solidFill>
-            <a:srgbClr val="1C4FD8"/>
-          </a:solidFill>
-          <a:ln>
-            <a:noFill/>
-          </a:ln>
-          <a:effectLst/>
-        </p:spPr>
-        <p:style>
-          <a:lnRef idx="1">
-            <a:schemeClr val="accent1"/>
-          </a:lnRef>
-          <a:fillRef idx="3">
-            <a:schemeClr val="accent1"/>
-          </a:fillRef>
-          <a:effectRef idx="2">
-            <a:schemeClr val="accent1"/>
-          </a:effectRef>
-          <a:fontRef idx="minor">
-            <a:schemeClr val="lt1"/>
-          </a:fontRef>
-        </p:style>
-        <p:txBody>
-          <a:bodyPr rtlCol="0" anchor="ctr" wrap="square"/>
-          <a:lstStyle/>
-          <a:p>
-            <a:pPr algn="ctr"/>
-          </a:p>
-        </p:txBody>
-      </p:sp>
-      <p:sp>
-        <p:nvSpPr>
-          <p:cNvPr id="21" name="TextBox 20"/>
-          <p:cNvSpPr txBox="1"/>
-          <p:nvPr/>
-        </p:nvSpPr>
-        <p:spPr>
-          <a:xfrm>
-            <a:off x="8301532" y="4663440"/>
-            <a:ext cx="3323234" cy="786384"/>
-          </a:xfrm>
-          <a:prstGeom prst="rect">
-            <a:avLst/>
-          </a:prstGeom>
-          <a:noFill/>
-        </p:spPr>
-        <p:txBody>
-          <a:bodyPr wrap="square" anchor="t" lIns="0" rIns="0" tIns="0" bIns="0">
-            <a:spAutoFit/>
-          </a:bodyPr>
-          <a:lstStyle/>
-          <a:p>
-            <a:pPr algn="l">
-              <a:spcBef>
-                <a:spcPts val="0"/>
-              </a:spcBef>
-              <a:spcAft>
-                <a:spcPts val="200"/>
-              </a:spcAft>
-            </a:pPr>
-            <a:r>
-              <a:rPr sz="2200" b="1">
-                <a:solidFill>
-                  <a:srgbClr val="131A24"/>
-                </a:solidFill>
-                <a:latin typeface="Consolas"/>
-              </a:rPr>
-              <a:t>Evidence</a:t>
-            </a:r>
-          </a:p>
-          <a:p>
-            <a:pPr algn="l">
-              <a:lnSpc>
-                <a:spcPct val="115000"/>
-              </a:lnSpc>
-              <a:spcBef>
-                <a:spcPts val="0"/>
-              </a:spcBef>
-              <a:spcAft>
-                <a:spcPts val="0"/>
-              </a:spcAft>
-            </a:pPr>
-            <a:r>
-              <a:rPr sz="1000" b="0">
-                <a:solidFill>
-                  <a:srgbClr val="61707F"/>
-                </a:solidFill>
-                <a:latin typeface="Calibri"/>
-              </a:rPr>
-              <a:t>every result names the matching record, so output is checked not trusted</a:t>
-            </a:r>
-          </a:p>
-        </p:txBody>
-      </p:sp>
-      <p:sp>
-        <p:nvSpPr>
-          <p:cNvPr id="22" name="Rectangle 21"/>
-          <p:cNvSpPr/>
-          <p:nvPr/>
-        </p:nvSpPr>
-        <p:spPr>
-          <a:xfrm>
-            <a:off x="777240" y="5577840"/>
-            <a:ext cx="10847527" cy="603504"/>
-          </a:xfrm>
-          <a:prstGeom prst="rect">
-            <a:avLst/>
-          </a:prstGeom>
-          <a:solidFill>
-            <a:srgbClr val="E6ECFD"/>
-          </a:solidFill>
-          <a:ln>
-            <a:noFill/>
-          </a:ln>
-          <a:effectLst/>
-        </p:spPr>
-        <p:style>
-          <a:lnRef idx="1">
-            <a:schemeClr val="accent1"/>
-          </a:lnRef>
-          <a:fillRef idx="3">
-            <a:schemeClr val="accent1"/>
-          </a:fillRef>
-          <a:effectRef idx="2">
-            <a:schemeClr val="accent1"/>
-          </a:effectRef>
-          <a:fontRef idx="minor">
-            <a:schemeClr val="lt1"/>
-          </a:fontRef>
-        </p:style>
-        <p:txBody>
-          <a:bodyPr rtlCol="0" anchor="ctr" wrap="square"/>
-          <a:lstStyle/>
-          <a:p>
-            <a:pPr algn="ctr"/>
-          </a:p>
-        </p:txBody>
-      </p:sp>
-      <p:sp>
-        <p:nvSpPr>
-          <p:cNvPr id="23" name="Rectangle 22"/>
-          <p:cNvSpPr/>
-          <p:nvPr/>
-        </p:nvSpPr>
-        <p:spPr>
-          <a:xfrm>
-            <a:off x="777240" y="5577840"/>
-            <a:ext cx="38100" cy="603504"/>
-          </a:xfrm>
-          <a:prstGeom prst="rect">
-            <a:avLst/>
-          </a:prstGeom>
-          <a:solidFill>
-            <a:srgbClr val="1C4FD8"/>
-          </a:solidFill>
-          <a:ln>
-            <a:noFill/>
-          </a:ln>
-          <a:effectLst/>
-        </p:spPr>
-        <p:style>
-          <a:lnRef idx="1">
-            <a:schemeClr val="accent1"/>
-          </a:lnRef>
-          <a:fillRef idx="3">
-            <a:schemeClr val="accent1"/>
-          </a:fillRef>
-          <a:effectRef idx="2">
-            <a:schemeClr val="accent1"/>
-          </a:effectRef>
-          <a:fontRef idx="minor">
-            <a:schemeClr val="lt1"/>
-          </a:fontRef>
-        </p:style>
-        <p:txBody>
-          <a:bodyPr rtlCol="0" anchor="ctr" wrap="square"/>
-          <a:lstStyle/>
-          <a:p>
-            <a:pPr algn="ctr"/>
-          </a:p>
-        </p:txBody>
-      </p:sp>
-      <p:sp>
-        <p:nvSpPr>
-          <p:cNvPr id="24" name="TextBox 23"/>
-          <p:cNvSpPr txBox="1"/>
-          <p:nvPr/>
-        </p:nvSpPr>
-        <p:spPr>
-          <a:xfrm>
-            <a:off x="923544" y="5687568"/>
-            <a:ext cx="10573207" cy="420624"/>
-          </a:xfrm>
-          <a:prstGeom prst="rect">
-            <a:avLst/>
-          </a:prstGeom>
-          <a:noFill/>
-        </p:spPr>
-        <p:txBody>
-          <a:bodyPr wrap="square" anchor="t" lIns="0" rIns="0" tIns="0" bIns="0">
-            <a:spAutoFit/>
-          </a:bodyPr>
-          <a:lstStyle/>
-          <a:p>
-            <a:pPr algn="l">
-              <a:lnSpc>
-                <a:spcPct val="120000"/>
-              </a:lnSpc>
-              <a:spcBef>
-                <a:spcPts val="0"/>
-              </a:spcBef>
-              <a:spcAft>
-                <a:spcPts val="0"/>
-              </a:spcAft>
-            </a:pPr>
-            <a:r>
-              <a:rPr sz="1100" b="0">
-                <a:solidFill>
-                  <a:srgbClr val="35424F"/>
-                </a:solidFill>
-                <a:latin typeface="Calibri"/>
-              </a:rPr>
-              <a:t>Scope boundary — the system surfaces and ranks technically similar claims. It does not output novelty, validity or infringement conclusions; those are legal determinations, and the reranker prompt says so explicitly.</a:t>
-            </a:r>
-          </a:p>
-        </p:txBody>
-      </p:sp>
-      <p:sp>
-        <p:nvSpPr>
-          <p:cNvPr id="25" name="TextBox 24"/>
-          <p:cNvSpPr txBox="1"/>
-          <p:nvPr/>
-        </p:nvSpPr>
-        <p:spPr>
-          <a:xfrm>
-            <a:off x="777240" y="6419088"/>
-            <a:ext cx="10847527" cy="237744"/>
-          </a:xfrm>
-          <a:prstGeom prst="rect">
-            <a:avLst/>
-          </a:prstGeom>
-          <a:noFill/>
-        </p:spPr>
-        <p:txBody>
-          <a:bodyPr wrap="square" anchor="t" lIns="0" rIns="0" tIns="0" bIns="0">
-            <a:spAutoFit/>
-          </a:bodyPr>
-          <a:lstStyle/>
-          <a:p>
-            <a:pPr algn="l">
-              <a:spcBef>
-                <a:spcPts val="0"/>
-              </a:spcBef>
-              <a:spcAft>
-                <a:spcPts val="0"/>
-              </a:spcAft>
-            </a:pPr>
-            <a:r>
-              <a:rPr sz="1000" b="0">
-                <a:solidFill>
-                  <a:srgbClr val="61707F"/>
-                </a:solidFill>
-                <a:latin typeface="Consolas"/>
-              </a:rPr>
-              <a:t>640 patents · 18,743 indexed records · 329 tests · github.com/aryanjain285/thinkstruct</a:t>
+              <a:t>640 patents · 18,743 indexed records · 329 tests</a:t>
             </a:r>
           </a:p>
         </p:txBody>
@@ -5881,7 +5393,7 @@
                 </a:solidFill>
                 <a:latin typeface="Consolas"/>
               </a:rPr>
-              <a:t>ARCHITECTURE</a:t>
+              <a:t>HOW A SEARCH WORKS</a:t>
             </a:r>
           </a:p>
         </p:txBody>
@@ -5926,7 +5438,7 @@
                 </a:solidFill>
                 <a:latin typeface="Georgia"/>
               </a:rPr>
-              <a:t>Two retrievers, one filter set, fused and reranked</a:t>
+              <a:t>Two ways of searching, merged into one answer</a:t>
             </a:r>
           </a:p>
         </p:txBody>
@@ -5939,8 +5451,133 @@
         </p:nvSpPr>
         <p:spPr>
           <a:xfrm>
-            <a:off x="566928" y="1554480"/>
-            <a:ext cx="1572768" cy="566928"/>
+            <a:off x="566928" y="1792224"/>
+            <a:ext cx="1280160" cy="658368"/>
+          </a:xfrm>
+          <a:prstGeom prst="rect">
+            <a:avLst/>
+          </a:prstGeom>
+          <a:solidFill>
+            <a:srgbClr val="F4F6F8"/>
+          </a:solidFill>
+          <a:ln w="9525">
+            <a:solidFill>
+              <a:srgbClr val="D5DBE2"/>
+            </a:solidFill>
+          </a:ln>
+          <a:effectLst/>
+        </p:spPr>
+        <p:style>
+          <a:lnRef idx="1">
+            <a:schemeClr val="accent1"/>
+          </a:lnRef>
+          <a:fillRef idx="3">
+            <a:schemeClr val="accent1"/>
+          </a:fillRef>
+          <a:effectRef idx="2">
+            <a:schemeClr val="accent1"/>
+          </a:effectRef>
+          <a:fontRef idx="minor">
+            <a:schemeClr val="lt1"/>
+          </a:fontRef>
+        </p:style>
+        <p:txBody>
+          <a:bodyPr rtlCol="0" anchor="ctr" wrap="square" rIns="54864" tIns="0" bIns="0"/>
+          <a:lstStyle/>
+          <a:p>
+            <a:pPr algn="ctr">
+              <a:spcBef>
+                <a:spcPts val="0"/>
+              </a:spcBef>
+              <a:spcAft>
+                <a:spcPts val="0"/>
+              </a:spcAft>
+            </a:pPr>
+            <a:r>
+              <a:rPr sz="1200" b="1">
+                <a:solidFill>
+                  <a:srgbClr val="131A24"/>
+                </a:solidFill>
+                <a:latin typeface="Calibri"/>
+              </a:rPr>
+              <a:t>Your query</a:t>
+            </a:r>
+          </a:p>
+          <a:p>
+            <a:pPr algn="ctr">
+              <a:spcBef>
+                <a:spcPts val="0"/>
+              </a:spcBef>
+              <a:spcAft>
+                <a:spcPts val="0"/>
+              </a:spcAft>
+            </a:pPr>
+            <a:r>
+              <a:rPr sz="900" b="0">
+                <a:solidFill>
+                  <a:srgbClr val="61707F"/>
+                </a:solidFill>
+                <a:latin typeface="Consolas"/>
+              </a:rPr>
+              <a:t>plain English</a:t>
+            </a:r>
+          </a:p>
+        </p:txBody>
+      </p:sp>
+      <p:sp>
+        <p:nvSpPr>
+          <p:cNvPr id="7" name="Right Arrow 6"/>
+          <p:cNvSpPr/>
+          <p:nvPr/>
+        </p:nvSpPr>
+        <p:spPr>
+          <a:xfrm>
+            <a:off x="1901952" y="2057400"/>
+            <a:ext cx="292608" cy="128016"/>
+          </a:xfrm>
+          <a:prstGeom prst="rightArrow">
+            <a:avLst/>
+          </a:prstGeom>
+          <a:solidFill>
+            <a:srgbClr val="1C4FD8"/>
+          </a:solidFill>
+          <a:ln>
+            <a:noFill/>
+          </a:ln>
+          <a:effectLst/>
+        </p:spPr>
+        <p:style>
+          <a:lnRef idx="1">
+            <a:schemeClr val="accent1"/>
+          </a:lnRef>
+          <a:fillRef idx="3">
+            <a:schemeClr val="accent1"/>
+          </a:fillRef>
+          <a:effectRef idx="2">
+            <a:schemeClr val="accent1"/>
+          </a:effectRef>
+          <a:fontRef idx="minor">
+            <a:schemeClr val="lt1"/>
+          </a:fontRef>
+        </p:style>
+        <p:txBody>
+          <a:bodyPr rtlCol="0" anchor="ctr"/>
+          <a:lstStyle/>
+          <a:p>
+            <a:pPr algn="ctr"/>
+          </a:p>
+        </p:txBody>
+      </p:sp>
+      <p:sp>
+        <p:nvSpPr>
+          <p:cNvPr id="8" name="Rectangle 7"/>
+          <p:cNvSpPr/>
+          <p:nvPr/>
+        </p:nvSpPr>
+        <p:spPr>
+          <a:xfrm>
+            <a:off x="2249424" y="1792224"/>
+            <a:ext cx="1783080" cy="658368"/>
           </a:xfrm>
           <a:prstGeom prst="rect">
             <a:avLst/>
@@ -5988,7 +5625,7 @@
                 </a:solidFill>
                 <a:latin typeface="Calibri"/>
               </a:rPr>
-              <a:t>Raw JSON</a:t>
+              <a:t>Narrow it down</a:t>
             </a:r>
           </a:p>
           <a:p>
@@ -6007,21 +5644,197 @@
                 </a:solidFill>
                 <a:latin typeface="Consolas"/>
               </a:rPr>
-              <a:t>64 files</a:t>
-            </a:r>
-          </a:p>
-        </p:txBody>
-      </p:sp>
-      <p:sp>
-        <p:nvSpPr>
-          <p:cNvPr id="7" name="Right Arrow 6"/>
+              <a:t>wheels only, etc.</a:t>
+            </a:r>
+          </a:p>
+        </p:txBody>
+      </p:sp>
+      <p:sp>
+        <p:nvSpPr>
+          <p:cNvPr id="9" name="Rectangle 8"/>
           <p:cNvSpPr/>
           <p:nvPr/>
         </p:nvSpPr>
         <p:spPr>
           <a:xfrm>
-            <a:off x="2212848" y="1773936"/>
-            <a:ext cx="237744" cy="128016"/>
+            <a:off x="2249424" y="1792224"/>
+            <a:ext cx="50292" cy="658368"/>
+          </a:xfrm>
+          <a:prstGeom prst="rect">
+            <a:avLst/>
+          </a:prstGeom>
+          <a:solidFill>
+            <a:srgbClr val="1C4FD8"/>
+          </a:solidFill>
+          <a:ln>
+            <a:noFill/>
+          </a:ln>
+          <a:effectLst/>
+        </p:spPr>
+        <p:style>
+          <a:lnRef idx="1">
+            <a:schemeClr val="accent1"/>
+          </a:lnRef>
+          <a:fillRef idx="3">
+            <a:schemeClr val="accent1"/>
+          </a:fillRef>
+          <a:effectRef idx="2">
+            <a:schemeClr val="accent1"/>
+          </a:effectRef>
+          <a:fontRef idx="minor">
+            <a:schemeClr val="lt1"/>
+          </a:fontRef>
+        </p:style>
+        <p:txBody>
+          <a:bodyPr rtlCol="0" anchor="ctr" wrap="square"/>
+          <a:lstStyle/>
+          <a:p>
+            <a:pPr algn="ctr"/>
+          </a:p>
+        </p:txBody>
+      </p:sp>
+      <p:sp>
+        <p:nvSpPr>
+          <p:cNvPr id="10" name="Rectangle 9"/>
+          <p:cNvSpPr/>
+          <p:nvPr/>
+        </p:nvSpPr>
+        <p:spPr>
+          <a:xfrm>
+            <a:off x="4215384" y="1554480"/>
+            <a:ext cx="19050" cy="1133856"/>
+          </a:xfrm>
+          <a:prstGeom prst="rect">
+            <a:avLst/>
+          </a:prstGeom>
+          <a:solidFill>
+            <a:srgbClr val="1C4FD8"/>
+          </a:solidFill>
+          <a:ln>
+            <a:noFill/>
+          </a:ln>
+          <a:effectLst/>
+        </p:spPr>
+        <p:style>
+          <a:lnRef idx="1">
+            <a:schemeClr val="accent1"/>
+          </a:lnRef>
+          <a:fillRef idx="3">
+            <a:schemeClr val="accent1"/>
+          </a:fillRef>
+          <a:effectRef idx="2">
+            <a:schemeClr val="accent1"/>
+          </a:effectRef>
+          <a:fontRef idx="minor">
+            <a:schemeClr val="lt1"/>
+          </a:fontRef>
+        </p:style>
+        <p:txBody>
+          <a:bodyPr rtlCol="0" anchor="ctr" wrap="square"/>
+          <a:lstStyle/>
+          <a:p>
+            <a:pPr algn="ctr"/>
+          </a:p>
+        </p:txBody>
+      </p:sp>
+      <p:sp>
+        <p:nvSpPr>
+          <p:cNvPr id="11" name="Rectangle 10"/>
+          <p:cNvSpPr/>
+          <p:nvPr/>
+        </p:nvSpPr>
+        <p:spPr>
+          <a:xfrm>
+            <a:off x="4032504" y="2111883"/>
+            <a:ext cx="201168" cy="19050"/>
+          </a:xfrm>
+          <a:prstGeom prst="rect">
+            <a:avLst/>
+          </a:prstGeom>
+          <a:solidFill>
+            <a:srgbClr val="1C4FD8"/>
+          </a:solidFill>
+          <a:ln>
+            <a:noFill/>
+          </a:ln>
+          <a:effectLst/>
+        </p:spPr>
+        <p:style>
+          <a:lnRef idx="1">
+            <a:schemeClr val="accent1"/>
+          </a:lnRef>
+          <a:fillRef idx="3">
+            <a:schemeClr val="accent1"/>
+          </a:fillRef>
+          <a:effectRef idx="2">
+            <a:schemeClr val="accent1"/>
+          </a:effectRef>
+          <a:fontRef idx="minor">
+            <a:schemeClr val="lt1"/>
+          </a:fontRef>
+        </p:style>
+        <p:txBody>
+          <a:bodyPr rtlCol="0" anchor="ctr" wrap="square"/>
+          <a:lstStyle/>
+          <a:p>
+            <a:pPr algn="ctr"/>
+          </a:p>
+        </p:txBody>
+      </p:sp>
+      <p:sp>
+        <p:nvSpPr>
+          <p:cNvPr id="12" name="Rectangle 11"/>
+          <p:cNvSpPr/>
+          <p:nvPr/>
+        </p:nvSpPr>
+        <p:spPr>
+          <a:xfrm>
+            <a:off x="4215384" y="1544955"/>
+            <a:ext cx="54864" cy="19050"/>
+          </a:xfrm>
+          <a:prstGeom prst="rect">
+            <a:avLst/>
+          </a:prstGeom>
+          <a:solidFill>
+            <a:srgbClr val="1C4FD8"/>
+          </a:solidFill>
+          <a:ln>
+            <a:noFill/>
+          </a:ln>
+          <a:effectLst/>
+        </p:spPr>
+        <p:style>
+          <a:lnRef idx="1">
+            <a:schemeClr val="accent1"/>
+          </a:lnRef>
+          <a:fillRef idx="3">
+            <a:schemeClr val="accent1"/>
+          </a:fillRef>
+          <a:effectRef idx="2">
+            <a:schemeClr val="accent1"/>
+          </a:effectRef>
+          <a:fontRef idx="minor">
+            <a:schemeClr val="lt1"/>
+          </a:fontRef>
+        </p:style>
+        <p:txBody>
+          <a:bodyPr rtlCol="0" anchor="ctr" wrap="square"/>
+          <a:lstStyle/>
+          <a:p>
+            <a:pPr algn="ctr"/>
+          </a:p>
+        </p:txBody>
+      </p:sp>
+      <p:sp>
+        <p:nvSpPr>
+          <p:cNvPr id="13" name="Right Arrow 12"/>
+          <p:cNvSpPr/>
+          <p:nvPr/>
+        </p:nvSpPr>
+        <p:spPr>
+          <a:xfrm>
+            <a:off x="4251960" y="1490472"/>
+            <a:ext cx="182880" cy="128016"/>
           </a:xfrm>
           <a:prstGeom prst="rightArrow">
             <a:avLst/>
@@ -6058,14 +5871,102 @@
       </p:sp>
       <p:sp>
         <p:nvSpPr>
-          <p:cNvPr id="8" name="Rectangle 7"/>
+          <p:cNvPr id="14" name="Rectangle 13"/>
           <p:cNvSpPr/>
           <p:nvPr/>
         </p:nvSpPr>
         <p:spPr>
           <a:xfrm>
-            <a:off x="2523744" y="1554480"/>
-            <a:ext cx="1572768" cy="566928"/>
+            <a:off x="4215384" y="2678811"/>
+            <a:ext cx="54864" cy="19050"/>
+          </a:xfrm>
+          <a:prstGeom prst="rect">
+            <a:avLst/>
+          </a:prstGeom>
+          <a:solidFill>
+            <a:srgbClr val="1C4FD8"/>
+          </a:solidFill>
+          <a:ln>
+            <a:noFill/>
+          </a:ln>
+          <a:effectLst/>
+        </p:spPr>
+        <p:style>
+          <a:lnRef idx="1">
+            <a:schemeClr val="accent1"/>
+          </a:lnRef>
+          <a:fillRef idx="3">
+            <a:schemeClr val="accent1"/>
+          </a:fillRef>
+          <a:effectRef idx="2">
+            <a:schemeClr val="accent1"/>
+          </a:effectRef>
+          <a:fontRef idx="minor">
+            <a:schemeClr val="lt1"/>
+          </a:fontRef>
+        </p:style>
+        <p:txBody>
+          <a:bodyPr rtlCol="0" anchor="ctr" wrap="square"/>
+          <a:lstStyle/>
+          <a:p>
+            <a:pPr algn="ctr"/>
+          </a:p>
+        </p:txBody>
+      </p:sp>
+      <p:sp>
+        <p:nvSpPr>
+          <p:cNvPr id="15" name="Right Arrow 14"/>
+          <p:cNvSpPr/>
+          <p:nvPr/>
+        </p:nvSpPr>
+        <p:spPr>
+          <a:xfrm>
+            <a:off x="4251960" y="2624328"/>
+            <a:ext cx="182880" cy="128016"/>
+          </a:xfrm>
+          <a:prstGeom prst="rightArrow">
+            <a:avLst/>
+          </a:prstGeom>
+          <a:solidFill>
+            <a:srgbClr val="1C4FD8"/>
+          </a:solidFill>
+          <a:ln>
+            <a:noFill/>
+          </a:ln>
+          <a:effectLst/>
+        </p:spPr>
+        <p:style>
+          <a:lnRef idx="1">
+            <a:schemeClr val="accent1"/>
+          </a:lnRef>
+          <a:fillRef idx="3">
+            <a:schemeClr val="accent1"/>
+          </a:fillRef>
+          <a:effectRef idx="2">
+            <a:schemeClr val="accent1"/>
+          </a:effectRef>
+          <a:fontRef idx="minor">
+            <a:schemeClr val="lt1"/>
+          </a:fontRef>
+        </p:style>
+        <p:txBody>
+          <a:bodyPr rtlCol="0" anchor="ctr"/>
+          <a:lstStyle/>
+          <a:p>
+            <a:pPr algn="ctr"/>
+          </a:p>
+        </p:txBody>
+      </p:sp>
+      <p:sp>
+        <p:nvSpPr>
+          <p:cNvPr id="16" name="Rectangle 15"/>
+          <p:cNvSpPr/>
+          <p:nvPr/>
+        </p:nvSpPr>
+        <p:spPr>
+          <a:xfrm>
+            <a:off x="4453128" y="1298448"/>
+            <a:ext cx="2103120" cy="512064"/>
           </a:xfrm>
           <a:prstGeom prst="rect">
             <a:avLst/>
@@ -6113,7 +6014,7 @@
                 </a:solidFill>
                 <a:latin typeface="Calibri"/>
               </a:rPr>
-              <a:t>Validate</a:t>
+              <a:t>Keyword search</a:t>
             </a:r>
           </a:p>
           <a:p>
@@ -6132,65 +6033,21 @@
                 </a:solidFill>
                 <a:latin typeface="Consolas"/>
               </a:rPr>
-              <a:t>graded</a:t>
-            </a:r>
-          </a:p>
-        </p:txBody>
-      </p:sp>
-      <p:sp>
-        <p:nvSpPr>
-          <p:cNvPr id="9" name="Right Arrow 8"/>
+              <a:t>exact wording</a:t>
+            </a:r>
+          </a:p>
+        </p:txBody>
+      </p:sp>
+      <p:sp>
+        <p:nvSpPr>
+          <p:cNvPr id="17" name="Rectangle 16"/>
           <p:cNvSpPr/>
           <p:nvPr/>
         </p:nvSpPr>
         <p:spPr>
           <a:xfrm>
-            <a:off x="4169664" y="1773936"/>
-            <a:ext cx="237744" cy="128016"/>
-          </a:xfrm>
-          <a:prstGeom prst="rightArrow">
-            <a:avLst/>
-          </a:prstGeom>
-          <a:solidFill>
-            <a:srgbClr val="1C4FD8"/>
-          </a:solidFill>
-          <a:ln>
-            <a:noFill/>
-          </a:ln>
-          <a:effectLst/>
-        </p:spPr>
-        <p:style>
-          <a:lnRef idx="1">
-            <a:schemeClr val="accent1"/>
-          </a:lnRef>
-          <a:fillRef idx="3">
-            <a:schemeClr val="accent1"/>
-          </a:fillRef>
-          <a:effectRef idx="2">
-            <a:schemeClr val="accent1"/>
-          </a:effectRef>
-          <a:fontRef idx="minor">
-            <a:schemeClr val="lt1"/>
-          </a:fontRef>
-        </p:style>
-        <p:txBody>
-          <a:bodyPr rtlCol="0" anchor="ctr"/>
-          <a:lstStyle/>
-          <a:p>
-            <a:pPr algn="ctr"/>
-          </a:p>
-        </p:txBody>
-      </p:sp>
-      <p:sp>
-        <p:nvSpPr>
-          <p:cNvPr id="10" name="Rectangle 9"/>
-          <p:cNvSpPr/>
-          <p:nvPr/>
-        </p:nvSpPr>
-        <p:spPr>
-          <a:xfrm>
-            <a:off x="4480560" y="1554480"/>
-            <a:ext cx="1572768" cy="566928"/>
+            <a:off x="4453128" y="2432304"/>
+            <a:ext cx="2103120" cy="512064"/>
           </a:xfrm>
           <a:prstGeom prst="rect">
             <a:avLst/>
@@ -6238,7 +6095,7 @@
                 </a:solidFill>
                 <a:latin typeface="Calibri"/>
               </a:rPr>
-              <a:t>Normalise</a:t>
+              <a:t>Meaning search</a:t>
             </a:r>
           </a:p>
           <a:p>
@@ -6257,21 +6114,153 @@
                 </a:solidFill>
                 <a:latin typeface="Consolas"/>
               </a:rPr>
-              <a:t>NFKC</a:t>
-            </a:r>
-          </a:p>
-        </p:txBody>
-      </p:sp>
-      <p:sp>
-        <p:nvSpPr>
-          <p:cNvPr id="11" name="Right Arrow 10"/>
+              <a:t>different wording</a:t>
+            </a:r>
+          </a:p>
+        </p:txBody>
+      </p:sp>
+      <p:sp>
+        <p:nvSpPr>
+          <p:cNvPr id="18" name="Rectangle 17"/>
           <p:cNvSpPr/>
           <p:nvPr/>
         </p:nvSpPr>
         <p:spPr>
           <a:xfrm>
-            <a:off x="6126480" y="1773936"/>
-            <a:ext cx="237744" cy="128016"/>
+            <a:off x="6775704" y="1554480"/>
+            <a:ext cx="19050" cy="1133856"/>
+          </a:xfrm>
+          <a:prstGeom prst="rect">
+            <a:avLst/>
+          </a:prstGeom>
+          <a:solidFill>
+            <a:srgbClr val="1C4FD8"/>
+          </a:solidFill>
+          <a:ln>
+            <a:noFill/>
+          </a:ln>
+          <a:effectLst/>
+        </p:spPr>
+        <p:style>
+          <a:lnRef idx="1">
+            <a:schemeClr val="accent1"/>
+          </a:lnRef>
+          <a:fillRef idx="3">
+            <a:schemeClr val="accent1"/>
+          </a:fillRef>
+          <a:effectRef idx="2">
+            <a:schemeClr val="accent1"/>
+          </a:effectRef>
+          <a:fontRef idx="minor">
+            <a:schemeClr val="lt1"/>
+          </a:fontRef>
+        </p:style>
+        <p:txBody>
+          <a:bodyPr rtlCol="0" anchor="ctr" wrap="square"/>
+          <a:lstStyle/>
+          <a:p>
+            <a:pPr algn="ctr"/>
+          </a:p>
+        </p:txBody>
+      </p:sp>
+      <p:sp>
+        <p:nvSpPr>
+          <p:cNvPr id="19" name="Rectangle 18"/>
+          <p:cNvSpPr/>
+          <p:nvPr/>
+        </p:nvSpPr>
+        <p:spPr>
+          <a:xfrm>
+            <a:off x="6556248" y="1544955"/>
+            <a:ext cx="219456" cy="19050"/>
+          </a:xfrm>
+          <a:prstGeom prst="rect">
+            <a:avLst/>
+          </a:prstGeom>
+          <a:solidFill>
+            <a:srgbClr val="1C4FD8"/>
+          </a:solidFill>
+          <a:ln>
+            <a:noFill/>
+          </a:ln>
+          <a:effectLst/>
+        </p:spPr>
+        <p:style>
+          <a:lnRef idx="1">
+            <a:schemeClr val="accent1"/>
+          </a:lnRef>
+          <a:fillRef idx="3">
+            <a:schemeClr val="accent1"/>
+          </a:fillRef>
+          <a:effectRef idx="2">
+            <a:schemeClr val="accent1"/>
+          </a:effectRef>
+          <a:fontRef idx="minor">
+            <a:schemeClr val="lt1"/>
+          </a:fontRef>
+        </p:style>
+        <p:txBody>
+          <a:bodyPr rtlCol="0" anchor="ctr" wrap="square"/>
+          <a:lstStyle/>
+          <a:p>
+            <a:pPr algn="ctr"/>
+          </a:p>
+        </p:txBody>
+      </p:sp>
+      <p:sp>
+        <p:nvSpPr>
+          <p:cNvPr id="20" name="Rectangle 19"/>
+          <p:cNvSpPr/>
+          <p:nvPr/>
+        </p:nvSpPr>
+        <p:spPr>
+          <a:xfrm>
+            <a:off x="6556248" y="2678811"/>
+            <a:ext cx="219456" cy="19050"/>
+          </a:xfrm>
+          <a:prstGeom prst="rect">
+            <a:avLst/>
+          </a:prstGeom>
+          <a:solidFill>
+            <a:srgbClr val="1C4FD8"/>
+          </a:solidFill>
+          <a:ln>
+            <a:noFill/>
+          </a:ln>
+          <a:effectLst/>
+        </p:spPr>
+        <p:style>
+          <a:lnRef idx="1">
+            <a:schemeClr val="accent1"/>
+          </a:lnRef>
+          <a:fillRef idx="3">
+            <a:schemeClr val="accent1"/>
+          </a:fillRef>
+          <a:effectRef idx="2">
+            <a:schemeClr val="accent1"/>
+          </a:effectRef>
+          <a:fontRef idx="minor">
+            <a:schemeClr val="lt1"/>
+          </a:fontRef>
+        </p:style>
+        <p:txBody>
+          <a:bodyPr rtlCol="0" anchor="ctr" wrap="square"/>
+          <a:lstStyle/>
+          <a:p>
+            <a:pPr algn="ctr"/>
+          </a:p>
+        </p:txBody>
+      </p:sp>
+      <p:sp>
+        <p:nvSpPr>
+          <p:cNvPr id="21" name="Right Arrow 20"/>
+          <p:cNvSpPr/>
+          <p:nvPr/>
+        </p:nvSpPr>
+        <p:spPr>
+          <a:xfrm>
+            <a:off x="6775704" y="2057400"/>
+            <a:ext cx="329184" cy="128016"/>
           </a:xfrm>
           <a:prstGeom prst="rightArrow">
             <a:avLst/>
@@ -6308,14 +6297,139 @@
       </p:sp>
       <p:sp>
         <p:nvSpPr>
-          <p:cNvPr id="12" name="Rectangle 11"/>
+          <p:cNvPr id="22" name="Rectangle 21"/>
           <p:cNvSpPr/>
           <p:nvPr/>
         </p:nvSpPr>
         <p:spPr>
           <a:xfrm>
-            <a:off x="6437376" y="1554480"/>
-            <a:ext cx="1572768" cy="566928"/>
+            <a:off x="7159752" y="1792224"/>
+            <a:ext cx="1325880" cy="658368"/>
+          </a:xfrm>
+          <a:prstGeom prst="rect">
+            <a:avLst/>
+          </a:prstGeom>
+          <a:solidFill>
+            <a:srgbClr val="E6ECFD"/>
+          </a:solidFill>
+          <a:ln w="9525">
+            <a:solidFill>
+              <a:srgbClr val="1C4FD8"/>
+            </a:solidFill>
+          </a:ln>
+          <a:effectLst/>
+        </p:spPr>
+        <p:style>
+          <a:lnRef idx="1">
+            <a:schemeClr val="accent1"/>
+          </a:lnRef>
+          <a:fillRef idx="3">
+            <a:schemeClr val="accent1"/>
+          </a:fillRef>
+          <a:effectRef idx="2">
+            <a:schemeClr val="accent1"/>
+          </a:effectRef>
+          <a:fontRef idx="minor">
+            <a:schemeClr val="lt1"/>
+          </a:fontRef>
+        </p:style>
+        <p:txBody>
+          <a:bodyPr rtlCol="0" anchor="ctr" wrap="square" rIns="54864" tIns="0" bIns="0"/>
+          <a:lstStyle/>
+          <a:p>
+            <a:pPr algn="ctr">
+              <a:spcBef>
+                <a:spcPts val="0"/>
+              </a:spcBef>
+              <a:spcAft>
+                <a:spcPts val="0"/>
+              </a:spcAft>
+            </a:pPr>
+            <a:r>
+              <a:rPr sz="1200" b="1">
+                <a:solidFill>
+                  <a:srgbClr val="131A24"/>
+                </a:solidFill>
+                <a:latin typeface="Calibri"/>
+              </a:rPr>
+              <a:t>Merge</a:t>
+            </a:r>
+          </a:p>
+          <a:p>
+            <a:pPr algn="ctr">
+              <a:spcBef>
+                <a:spcPts val="0"/>
+              </a:spcBef>
+              <a:spcAft>
+                <a:spcPts val="0"/>
+              </a:spcAft>
+            </a:pPr>
+            <a:r>
+              <a:rPr sz="900" b="0">
+                <a:solidFill>
+                  <a:srgbClr val="61707F"/>
+                </a:solidFill>
+                <a:latin typeface="Consolas"/>
+              </a:rPr>
+              <a:t>both lists</a:t>
+            </a:r>
+          </a:p>
+        </p:txBody>
+      </p:sp>
+      <p:sp>
+        <p:nvSpPr>
+          <p:cNvPr id="23" name="Right Arrow 22"/>
+          <p:cNvSpPr/>
+          <p:nvPr/>
+        </p:nvSpPr>
+        <p:spPr>
+          <a:xfrm>
+            <a:off x="8540496" y="2057400"/>
+            <a:ext cx="292608" cy="128016"/>
+          </a:xfrm>
+          <a:prstGeom prst="rightArrow">
+            <a:avLst/>
+          </a:prstGeom>
+          <a:solidFill>
+            <a:srgbClr val="1C4FD8"/>
+          </a:solidFill>
+          <a:ln>
+            <a:noFill/>
+          </a:ln>
+          <a:effectLst/>
+        </p:spPr>
+        <p:style>
+          <a:lnRef idx="1">
+            <a:schemeClr val="accent1"/>
+          </a:lnRef>
+          <a:fillRef idx="3">
+            <a:schemeClr val="accent1"/>
+          </a:fillRef>
+          <a:effectRef idx="2">
+            <a:schemeClr val="accent1"/>
+          </a:effectRef>
+          <a:fontRef idx="minor">
+            <a:schemeClr val="lt1"/>
+          </a:fontRef>
+        </p:style>
+        <p:txBody>
+          <a:bodyPr rtlCol="0" anchor="ctr"/>
+          <a:lstStyle/>
+          <a:p>
+            <a:pPr algn="ctr"/>
+          </a:p>
+        </p:txBody>
+      </p:sp>
+      <p:sp>
+        <p:nvSpPr>
+          <p:cNvPr id="24" name="Rectangle 23"/>
+          <p:cNvSpPr/>
+          <p:nvPr/>
+        </p:nvSpPr>
+        <p:spPr>
+          <a:xfrm>
+            <a:off x="8887968" y="1792224"/>
+            <a:ext cx="1280160" cy="658368"/>
           </a:xfrm>
           <a:prstGeom prst="rect">
             <a:avLst/>
@@ -6363,7 +6477,7 @@
                 </a:solidFill>
                 <a:latin typeface="Calibri"/>
               </a:rPr>
-              <a:t>Reconstruct</a:t>
+              <a:t>Re-rank</a:t>
             </a:r>
           </a:p>
           <a:p>
@@ -6382,65 +6496,21 @@
                 </a:solidFill>
                 <a:latin typeface="Consolas"/>
               </a:rPr>
-              <a:t>claims</a:t>
-            </a:r>
-          </a:p>
-        </p:txBody>
-      </p:sp>
-      <p:sp>
-        <p:nvSpPr>
-          <p:cNvPr id="13" name="Rectangle 12"/>
+              <a:t>top 50 only</a:t>
+            </a:r>
+          </a:p>
+        </p:txBody>
+      </p:sp>
+      <p:sp>
+        <p:nvSpPr>
+          <p:cNvPr id="25" name="Right Arrow 24"/>
           <p:cNvSpPr/>
           <p:nvPr/>
         </p:nvSpPr>
         <p:spPr>
           <a:xfrm>
-            <a:off x="6437376" y="1554480"/>
-            <a:ext cx="50292" cy="566928"/>
-          </a:xfrm>
-          <a:prstGeom prst="rect">
-            <a:avLst/>
-          </a:prstGeom>
-          <a:solidFill>
-            <a:srgbClr val="A4530B"/>
-          </a:solidFill>
-          <a:ln>
-            <a:noFill/>
-          </a:ln>
-          <a:effectLst/>
-        </p:spPr>
-        <p:style>
-          <a:lnRef idx="1">
-            <a:schemeClr val="accent1"/>
-          </a:lnRef>
-          <a:fillRef idx="3">
-            <a:schemeClr val="accent1"/>
-          </a:fillRef>
-          <a:effectRef idx="2">
-            <a:schemeClr val="accent1"/>
-          </a:effectRef>
-          <a:fontRef idx="minor">
-            <a:schemeClr val="lt1"/>
-          </a:fontRef>
-        </p:style>
-        <p:txBody>
-          <a:bodyPr rtlCol="0" anchor="ctr" wrap="square"/>
-          <a:lstStyle/>
-          <a:p>
-            <a:pPr algn="ctr"/>
-          </a:p>
-        </p:txBody>
-      </p:sp>
-      <p:sp>
-        <p:nvSpPr>
-          <p:cNvPr id="14" name="Right Arrow 13"/>
-          <p:cNvSpPr/>
-          <p:nvPr/>
-        </p:nvSpPr>
-        <p:spPr>
-          <a:xfrm>
-            <a:off x="8083296" y="1773936"/>
-            <a:ext cx="237744" cy="128016"/>
+            <a:off x="10222992" y="2057400"/>
+            <a:ext cx="292608" cy="128016"/>
           </a:xfrm>
           <a:prstGeom prst="rightArrow">
             <a:avLst/>
@@ -6477,24 +6547,24 @@
       </p:sp>
       <p:sp>
         <p:nvSpPr>
-          <p:cNvPr id="15" name="Rectangle 14"/>
+          <p:cNvPr id="26" name="Rectangle 25"/>
           <p:cNvSpPr/>
           <p:nvPr/>
         </p:nvSpPr>
         <p:spPr>
           <a:xfrm>
-            <a:off x="8394192" y="1554480"/>
-            <a:ext cx="1572768" cy="566928"/>
+            <a:off x="10570464" y="1792224"/>
+            <a:ext cx="1234440" cy="658368"/>
           </a:xfrm>
           <a:prstGeom prst="rect">
             <a:avLst/>
           </a:prstGeom>
           <a:solidFill>
-            <a:srgbClr val="FFFFFF"/>
+            <a:srgbClr val="E3F2E9"/>
           </a:solidFill>
           <a:ln w="9525">
             <a:solidFill>
-              <a:srgbClr val="D5DBE2"/>
+              <a:srgbClr val="15683C"/>
             </a:solidFill>
           </a:ln>
           <a:effectLst/>
@@ -6532,7 +6602,7 @@
                 </a:solidFill>
                 <a:latin typeface="Calibri"/>
               </a:rPr>
-              <a:t>Records</a:t>
+              <a:t>Results</a:t>
             </a:r>
           </a:p>
           <a:p>
@@ -6551,21 +6621,21 @@
                 </a:solidFill>
                 <a:latin typeface="Consolas"/>
               </a:rPr>
-              <a:t>18,743</a:t>
-            </a:r>
-          </a:p>
-        </p:txBody>
-      </p:sp>
-      <p:sp>
-        <p:nvSpPr>
-          <p:cNvPr id="16" name="Rectangle 15"/>
+              <a:t>by patent</a:t>
+            </a:r>
+          </a:p>
+        </p:txBody>
+      </p:sp>
+      <p:sp>
+        <p:nvSpPr>
+          <p:cNvPr id="27" name="Rectangle 26"/>
           <p:cNvSpPr/>
           <p:nvPr/>
         </p:nvSpPr>
         <p:spPr>
           <a:xfrm>
-            <a:off x="10351008" y="1554480"/>
-            <a:ext cx="1325880" cy="566928"/>
+            <a:off x="566928" y="3236976"/>
+            <a:ext cx="5368899" cy="914400"/>
           </a:xfrm>
           <a:prstGeom prst="rect">
             <a:avLst/>
@@ -6573,10 +6643,8 @@
           <a:solidFill>
             <a:srgbClr val="E6ECFD"/>
           </a:solidFill>
-          <a:ln w="9525">
-            <a:solidFill>
-              <a:srgbClr val="1C4FD8"/>
-            </a:solidFill>
+          <a:ln>
+            <a:noFill/>
           </a:ln>
           <a:effectLst/>
         </p:spPr>
@@ -6595,289 +6663,23 @@
           </a:fontRef>
         </p:style>
         <p:txBody>
-          <a:bodyPr rtlCol="0" anchor="ctr" wrap="square" rIns="54864" tIns="0" bIns="0"/>
-          <a:lstStyle/>
-          <a:p>
-            <a:pPr algn="ctr">
-              <a:spcBef>
-                <a:spcPts val="0"/>
-              </a:spcBef>
-              <a:spcAft>
-                <a:spcPts val="0"/>
-              </a:spcAft>
-            </a:pPr>
-            <a:r>
-              <a:rPr sz="1200" b="1">
-                <a:solidFill>
-                  <a:srgbClr val="131A24"/>
-                </a:solidFill>
-                <a:latin typeface="Calibri"/>
-              </a:rPr>
-              <a:t>OpenSearch</a:t>
-            </a:r>
-          </a:p>
-          <a:p>
-            <a:pPr algn="ctr">
-              <a:spcBef>
-                <a:spcPts val="0"/>
-              </a:spcBef>
-              <a:spcAft>
-                <a:spcPts val="0"/>
-              </a:spcAft>
-            </a:pPr>
-            <a:r>
-              <a:rPr sz="900" b="0">
-                <a:solidFill>
-                  <a:srgbClr val="61707F"/>
-                </a:solidFill>
-                <a:latin typeface="Consolas"/>
-              </a:rPr>
-              <a:t>BM25 + kNN</a:t>
-            </a:r>
-          </a:p>
-        </p:txBody>
-      </p:sp>
-      <p:sp>
-        <p:nvSpPr>
-          <p:cNvPr id="17" name="Down Arrow 16"/>
+          <a:bodyPr rtlCol="0" anchor="ctr" wrap="square"/>
+          <a:lstStyle/>
+          <a:p>
+            <a:pPr algn="ctr"/>
+          </a:p>
+        </p:txBody>
+      </p:sp>
+      <p:sp>
+        <p:nvSpPr>
+          <p:cNvPr id="28" name="Rectangle 27"/>
           <p:cNvSpPr/>
           <p:nvPr/>
         </p:nvSpPr>
         <p:spPr>
           <a:xfrm>
-            <a:off x="1252728" y="2176272"/>
-            <a:ext cx="128016" cy="182880"/>
-          </a:xfrm>
-          <a:prstGeom prst="downArrow">
-            <a:avLst/>
-          </a:prstGeom>
-          <a:solidFill>
-            <a:srgbClr val="1C4FD8"/>
-          </a:solidFill>
-          <a:ln>
-            <a:noFill/>
-          </a:ln>
-          <a:effectLst/>
-        </p:spPr>
-        <p:style>
-          <a:lnRef idx="1">
-            <a:schemeClr val="accent1"/>
-          </a:lnRef>
-          <a:fillRef idx="3">
-            <a:schemeClr val="accent1"/>
-          </a:fillRef>
-          <a:effectRef idx="2">
-            <a:schemeClr val="accent1"/>
-          </a:effectRef>
-          <a:fontRef idx="minor">
-            <a:schemeClr val="lt1"/>
-          </a:fontRef>
-        </p:style>
-        <p:txBody>
-          <a:bodyPr rtlCol="0" anchor="ctr"/>
-          <a:lstStyle/>
-          <a:p>
-            <a:pPr algn="ctr"/>
-          </a:p>
-        </p:txBody>
-      </p:sp>
-      <p:sp>
-        <p:nvSpPr>
-          <p:cNvPr id="18" name="Rectangle 17"/>
-          <p:cNvSpPr/>
-          <p:nvPr/>
-        </p:nvSpPr>
-        <p:spPr>
-          <a:xfrm>
-            <a:off x="566928" y="2487168"/>
-            <a:ext cx="1463040" cy="502920"/>
-          </a:xfrm>
-          <a:prstGeom prst="rect">
-            <a:avLst/>
-          </a:prstGeom>
-          <a:solidFill>
-            <a:srgbClr val="FFFFFF"/>
-          </a:solidFill>
-          <a:ln w="9525">
-            <a:solidFill>
-              <a:srgbClr val="D5DBE2"/>
-            </a:solidFill>
-          </a:ln>
-          <a:effectLst/>
-        </p:spPr>
-        <p:style>
-          <a:lnRef idx="1">
-            <a:schemeClr val="accent1"/>
-          </a:lnRef>
-          <a:fillRef idx="3">
-            <a:schemeClr val="accent1"/>
-          </a:fillRef>
-          <a:effectRef idx="2">
-            <a:schemeClr val="accent1"/>
-          </a:effectRef>
-          <a:fontRef idx="minor">
-            <a:schemeClr val="lt1"/>
-          </a:fontRef>
-        </p:style>
-        <p:txBody>
-          <a:bodyPr rtlCol="0" anchor="ctr" wrap="square" rIns="54864" tIns="0" bIns="0"/>
-          <a:lstStyle/>
-          <a:p>
-            <a:pPr algn="ctr">
-              <a:spcBef>
-                <a:spcPts val="0"/>
-              </a:spcBef>
-              <a:spcAft>
-                <a:spcPts val="0"/>
-              </a:spcAft>
-            </a:pPr>
-            <a:r>
-              <a:rPr sz="1200" b="1">
-                <a:solidFill>
-                  <a:srgbClr val="131A24"/>
-                </a:solidFill>
-                <a:latin typeface="Calibri"/>
-              </a:rPr>
-              <a:t>Query</a:t>
-            </a:r>
-          </a:p>
-        </p:txBody>
-      </p:sp>
-      <p:sp>
-        <p:nvSpPr>
-          <p:cNvPr id="19" name="Right Arrow 18"/>
-          <p:cNvSpPr/>
-          <p:nvPr/>
-        </p:nvSpPr>
-        <p:spPr>
-          <a:xfrm>
-            <a:off x="2103120" y="2670048"/>
-            <a:ext cx="310896" cy="128016"/>
-          </a:xfrm>
-          <a:prstGeom prst="rightArrow">
-            <a:avLst/>
-          </a:prstGeom>
-          <a:solidFill>
-            <a:srgbClr val="1C4FD8"/>
-          </a:solidFill>
-          <a:ln>
-            <a:noFill/>
-          </a:ln>
-          <a:effectLst/>
-        </p:spPr>
-        <p:style>
-          <a:lnRef idx="1">
-            <a:schemeClr val="accent1"/>
-          </a:lnRef>
-          <a:fillRef idx="3">
-            <a:schemeClr val="accent1"/>
-          </a:fillRef>
-          <a:effectRef idx="2">
-            <a:schemeClr val="accent1"/>
-          </a:effectRef>
-          <a:fontRef idx="minor">
-            <a:schemeClr val="lt1"/>
-          </a:fontRef>
-        </p:style>
-        <p:txBody>
-          <a:bodyPr rtlCol="0" anchor="ctr"/>
-          <a:lstStyle/>
-          <a:p>
-            <a:pPr algn="ctr"/>
-          </a:p>
-        </p:txBody>
-      </p:sp>
-      <p:sp>
-        <p:nvSpPr>
-          <p:cNvPr id="20" name="Rectangle 19"/>
-          <p:cNvSpPr/>
-          <p:nvPr/>
-        </p:nvSpPr>
-        <p:spPr>
-          <a:xfrm>
-            <a:off x="2487168" y="2487168"/>
-            <a:ext cx="1691640" cy="502920"/>
-          </a:xfrm>
-          <a:prstGeom prst="rect">
-            <a:avLst/>
-          </a:prstGeom>
-          <a:solidFill>
-            <a:srgbClr val="FFFFFF"/>
-          </a:solidFill>
-          <a:ln w="9525">
-            <a:solidFill>
-              <a:srgbClr val="D5DBE2"/>
-            </a:solidFill>
-          </a:ln>
-          <a:effectLst/>
-        </p:spPr>
-        <p:style>
-          <a:lnRef idx="1">
-            <a:schemeClr val="accent1"/>
-          </a:lnRef>
-          <a:fillRef idx="3">
-            <a:schemeClr val="accent1"/>
-          </a:fillRef>
-          <a:effectRef idx="2">
-            <a:schemeClr val="accent1"/>
-          </a:effectRef>
-          <a:fontRef idx="minor">
-            <a:schemeClr val="lt1"/>
-          </a:fontRef>
-        </p:style>
-        <p:txBody>
-          <a:bodyPr rtlCol="0" anchor="ctr" wrap="square" rIns="54864" tIns="0" bIns="0"/>
-          <a:lstStyle/>
-          <a:p>
-            <a:pPr algn="ctr">
-              <a:spcBef>
-                <a:spcPts val="0"/>
-              </a:spcBef>
-              <a:spcAft>
-                <a:spcPts val="0"/>
-              </a:spcAft>
-            </a:pPr>
-            <a:r>
-              <a:rPr sz="1200" b="1">
-                <a:solidFill>
-                  <a:srgbClr val="131A24"/>
-                </a:solidFill>
-                <a:latin typeface="Calibri"/>
-              </a:rPr>
-              <a:t>Pre-filters</a:t>
-            </a:r>
-          </a:p>
-          <a:p>
-            <a:pPr algn="ctr">
-              <a:spcBef>
-                <a:spcPts val="0"/>
-              </a:spcBef>
-              <a:spcAft>
-                <a:spcPts val="0"/>
-              </a:spcAft>
-            </a:pPr>
-            <a:r>
-              <a:rPr sz="900" b="0">
-                <a:solidFill>
-                  <a:srgbClr val="61707F"/>
-                </a:solidFill>
-                <a:latin typeface="Consolas"/>
-              </a:rPr>
-              <a:t>CPC · title · abstract</a:t>
-            </a:r>
-          </a:p>
-        </p:txBody>
-      </p:sp>
-      <p:sp>
-        <p:nvSpPr>
-          <p:cNvPr id="21" name="Rectangle 20"/>
-          <p:cNvSpPr/>
-          <p:nvPr/>
-        </p:nvSpPr>
-        <p:spPr>
-          <a:xfrm>
-            <a:off x="2487168" y="2487168"/>
-            <a:ext cx="50292" cy="502920"/>
+            <a:off x="566928" y="3236976"/>
+            <a:ext cx="38100" cy="914400"/>
           </a:xfrm>
           <a:prstGeom prst="rect">
             <a:avLst/>
@@ -6914,52 +6716,32 @@
       </p:sp>
       <p:sp>
         <p:nvSpPr>
-          <p:cNvPr id="22" name="Rectangle 21"/>
-          <p:cNvSpPr/>
+          <p:cNvPr id="29" name="TextBox 28"/>
+          <p:cNvSpPr txBox="1"/>
           <p:nvPr/>
         </p:nvSpPr>
         <p:spPr>
           <a:xfrm>
-            <a:off x="4498848" y="2176272"/>
-            <a:ext cx="1371600" cy="457200"/>
+            <a:off x="713232" y="3346704"/>
+            <a:ext cx="5094579" cy="731520"/>
           </a:xfrm>
           <a:prstGeom prst="rect">
             <a:avLst/>
           </a:prstGeom>
-          <a:solidFill>
-            <a:srgbClr val="FFFFFF"/>
-          </a:solidFill>
-          <a:ln w="9525">
-            <a:solidFill>
-              <a:srgbClr val="D5DBE2"/>
-            </a:solidFill>
-          </a:ln>
-          <a:effectLst/>
-        </p:spPr>
-        <p:style>
-          <a:lnRef idx="1">
-            <a:schemeClr val="accent1"/>
-          </a:lnRef>
-          <a:fillRef idx="3">
-            <a:schemeClr val="accent1"/>
-          </a:fillRef>
-          <a:effectRef idx="2">
-            <a:schemeClr val="accent1"/>
-          </a:effectRef>
-          <a:fontRef idx="minor">
-            <a:schemeClr val="lt1"/>
-          </a:fontRef>
-        </p:style>
-        <p:txBody>
-          <a:bodyPr rtlCol="0" anchor="ctr" wrap="square" rIns="54864" tIns="0" bIns="0"/>
-          <a:lstStyle/>
-          <a:p>
-            <a:pPr algn="ctr">
+          <a:noFill/>
+        </p:spPr>
+        <p:txBody>
+          <a:bodyPr wrap="square" anchor="t" lIns="0" rIns="0" tIns="0" bIns="0">
+            <a:spAutoFit/>
+          </a:bodyPr>
+          <a:lstStyle/>
+          <a:p>
+            <a:pPr algn="l">
               <a:spcBef>
                 <a:spcPts val="0"/>
               </a:spcBef>
               <a:spcAft>
-                <a:spcPts val="0"/>
+                <a:spcPts val="400"/>
               </a:spcAft>
             </a:pPr>
             <a:r>
@@ -6969,11 +6751,14 @@
                 </a:solidFill>
                 <a:latin typeface="Calibri"/>
               </a:rPr>
-              <a:t>BM25</a:t>
-            </a:r>
-          </a:p>
-          <a:p>
-            <a:pPr algn="ctr">
+              <a:t>Why search twice</a:t>
+            </a:r>
+          </a:p>
+          <a:p>
+            <a:pPr algn="l">
+              <a:lnSpc>
+                <a:spcPct val="120000"/>
+              </a:lnSpc>
               <a:spcBef>
                 <a:spcPts val="0"/>
               </a:spcBef>
@@ -6982,433 +6767,14 @@
               </a:spcAft>
             </a:pPr>
             <a:r>
-              <a:rPr sz="900" b="0">
-                <a:solidFill>
-                  <a:srgbClr val="61707F"/>
-                </a:solidFill>
-                <a:latin typeface="Consolas"/>
-              </a:rPr>
-              <a:t>lexical</a:t>
-            </a:r>
-          </a:p>
-        </p:txBody>
-      </p:sp>
-      <p:sp>
-        <p:nvSpPr>
-          <p:cNvPr id="23" name="Rectangle 22"/>
-          <p:cNvSpPr/>
-          <p:nvPr/>
-        </p:nvSpPr>
-        <p:spPr>
-          <a:xfrm>
-            <a:off x="4498848" y="2798064"/>
-            <a:ext cx="1371600" cy="457200"/>
-          </a:xfrm>
-          <a:prstGeom prst="rect">
-            <a:avLst/>
-          </a:prstGeom>
-          <a:solidFill>
-            <a:srgbClr val="FFFFFF"/>
-          </a:solidFill>
-          <a:ln w="9525">
-            <a:solidFill>
-              <a:srgbClr val="D5DBE2"/>
-            </a:solidFill>
-          </a:ln>
-          <a:effectLst/>
-        </p:spPr>
-        <p:style>
-          <a:lnRef idx="1">
-            <a:schemeClr val="accent1"/>
-          </a:lnRef>
-          <a:fillRef idx="3">
-            <a:schemeClr val="accent1"/>
-          </a:fillRef>
-          <a:effectRef idx="2">
-            <a:schemeClr val="accent1"/>
-          </a:effectRef>
-          <a:fontRef idx="minor">
-            <a:schemeClr val="lt1"/>
-          </a:fontRef>
-        </p:style>
-        <p:txBody>
-          <a:bodyPr rtlCol="0" anchor="ctr" wrap="square" rIns="54864" tIns="0" bIns="0"/>
-          <a:lstStyle/>
-          <a:p>
-            <a:pPr algn="ctr">
-              <a:spcBef>
-                <a:spcPts val="0"/>
-              </a:spcBef>
-              <a:spcAft>
-                <a:spcPts val="0"/>
-              </a:spcAft>
-            </a:pPr>
-            <a:r>
-              <a:rPr sz="1200" b="1">
-                <a:solidFill>
-                  <a:srgbClr val="131A24"/>
+              <a:rPr sz="1100" b="0">
+                <a:solidFill>
+                  <a:srgbClr val="35424F"/>
                 </a:solidFill>
                 <a:latin typeface="Calibri"/>
               </a:rPr>
-              <a:t>k-NN</a:t>
-            </a:r>
-          </a:p>
-          <a:p>
-            <a:pPr algn="ctr">
-              <a:spcBef>
-                <a:spcPts val="0"/>
-              </a:spcBef>
-              <a:spcAft>
-                <a:spcPts val="0"/>
-              </a:spcAft>
-            </a:pPr>
-            <a:r>
-              <a:rPr sz="900" b="0">
-                <a:solidFill>
-                  <a:srgbClr val="61707F"/>
-                </a:solidFill>
-                <a:latin typeface="Consolas"/>
-              </a:rPr>
-              <a:t>semantic</a:t>
-            </a:r>
-          </a:p>
-        </p:txBody>
-      </p:sp>
-      <p:sp>
-        <p:nvSpPr>
-          <p:cNvPr id="24" name="Right Arrow 23"/>
-          <p:cNvSpPr/>
-          <p:nvPr/>
-        </p:nvSpPr>
-        <p:spPr>
-          <a:xfrm>
-            <a:off x="4206240" y="2670048"/>
-            <a:ext cx="256032" cy="128016"/>
-          </a:xfrm>
-          <a:prstGeom prst="rightArrow">
-            <a:avLst/>
-          </a:prstGeom>
-          <a:solidFill>
-            <a:srgbClr val="1C4FD8"/>
-          </a:solidFill>
-          <a:ln>
-            <a:noFill/>
-          </a:ln>
-          <a:effectLst/>
-        </p:spPr>
-        <p:style>
-          <a:lnRef idx="1">
-            <a:schemeClr val="accent1"/>
-          </a:lnRef>
-          <a:fillRef idx="3">
-            <a:schemeClr val="accent1"/>
-          </a:fillRef>
-          <a:effectRef idx="2">
-            <a:schemeClr val="accent1"/>
-          </a:effectRef>
-          <a:fontRef idx="minor">
-            <a:schemeClr val="lt1"/>
-          </a:fontRef>
-        </p:style>
-        <p:txBody>
-          <a:bodyPr rtlCol="0" anchor="ctr"/>
-          <a:lstStyle/>
-          <a:p>
-            <a:pPr algn="ctr"/>
-          </a:p>
-        </p:txBody>
-      </p:sp>
-      <p:sp>
-        <p:nvSpPr>
-          <p:cNvPr id="25" name="Right Arrow 24"/>
-          <p:cNvSpPr/>
-          <p:nvPr/>
-        </p:nvSpPr>
-        <p:spPr>
-          <a:xfrm>
-            <a:off x="5897880" y="2670048"/>
-            <a:ext cx="182880" cy="128016"/>
-          </a:xfrm>
-          <a:prstGeom prst="rightArrow">
-            <a:avLst/>
-          </a:prstGeom>
-          <a:solidFill>
-            <a:srgbClr val="1C4FD8"/>
-          </a:solidFill>
-          <a:ln>
-            <a:noFill/>
-          </a:ln>
-          <a:effectLst/>
-        </p:spPr>
-        <p:style>
-          <a:lnRef idx="1">
-            <a:schemeClr val="accent1"/>
-          </a:lnRef>
-          <a:fillRef idx="3">
-            <a:schemeClr val="accent1"/>
-          </a:fillRef>
-          <a:effectRef idx="2">
-            <a:schemeClr val="accent1"/>
-          </a:effectRef>
-          <a:fontRef idx="minor">
-            <a:schemeClr val="lt1"/>
-          </a:fontRef>
-        </p:style>
-        <p:txBody>
-          <a:bodyPr rtlCol="0" anchor="ctr"/>
-          <a:lstStyle/>
-          <a:p>
-            <a:pPr algn="ctr"/>
-          </a:p>
-        </p:txBody>
-      </p:sp>
-      <p:sp>
-        <p:nvSpPr>
-          <p:cNvPr id="26" name="Rectangle 25"/>
-          <p:cNvSpPr/>
-          <p:nvPr/>
-        </p:nvSpPr>
-        <p:spPr>
-          <a:xfrm>
-            <a:off x="6099048" y="2487168"/>
-            <a:ext cx="1280160" cy="502920"/>
-          </a:xfrm>
-          <a:prstGeom prst="rect">
-            <a:avLst/>
-          </a:prstGeom>
-          <a:solidFill>
-            <a:srgbClr val="E6ECFD"/>
-          </a:solidFill>
-          <a:ln w="9525">
-            <a:solidFill>
-              <a:srgbClr val="1C4FD8"/>
-            </a:solidFill>
-          </a:ln>
-          <a:effectLst/>
-        </p:spPr>
-        <p:style>
-          <a:lnRef idx="1">
-            <a:schemeClr val="accent1"/>
-          </a:lnRef>
-          <a:fillRef idx="3">
-            <a:schemeClr val="accent1"/>
-          </a:fillRef>
-          <a:effectRef idx="2">
-            <a:schemeClr val="accent1"/>
-          </a:effectRef>
-          <a:fontRef idx="minor">
-            <a:schemeClr val="lt1"/>
-          </a:fontRef>
-        </p:style>
-        <p:txBody>
-          <a:bodyPr rtlCol="0" anchor="ctr" wrap="square" rIns="54864" tIns="0" bIns="0"/>
-          <a:lstStyle/>
-          <a:p>
-            <a:pPr algn="ctr">
-              <a:spcBef>
-                <a:spcPts val="0"/>
-              </a:spcBef>
-              <a:spcAft>
-                <a:spcPts val="0"/>
-              </a:spcAft>
-            </a:pPr>
-            <a:r>
-              <a:rPr sz="1200" b="1">
-                <a:solidFill>
-                  <a:srgbClr val="131A24"/>
-                </a:solidFill>
-                <a:latin typeface="Calibri"/>
-              </a:rPr>
-              <a:t>RRF fusion</a:t>
-            </a:r>
-          </a:p>
-          <a:p>
-            <a:pPr algn="ctr">
-              <a:spcBef>
-                <a:spcPts val="0"/>
-              </a:spcBef>
-              <a:spcAft>
-                <a:spcPts val="0"/>
-              </a:spcAft>
-            </a:pPr>
-            <a:r>
-              <a:rPr sz="900" b="0">
-                <a:solidFill>
-                  <a:srgbClr val="61707F"/>
-                </a:solidFill>
-                <a:latin typeface="Consolas"/>
-              </a:rPr>
-              <a:t>scale-free</a:t>
-            </a:r>
-          </a:p>
-        </p:txBody>
-      </p:sp>
-      <p:sp>
-        <p:nvSpPr>
-          <p:cNvPr id="27" name="Right Arrow 26"/>
-          <p:cNvSpPr/>
-          <p:nvPr/>
-        </p:nvSpPr>
-        <p:spPr>
-          <a:xfrm>
-            <a:off x="7397496" y="2670048"/>
-            <a:ext cx="164592" cy="128016"/>
-          </a:xfrm>
-          <a:prstGeom prst="rightArrow">
-            <a:avLst/>
-          </a:prstGeom>
-          <a:solidFill>
-            <a:srgbClr val="1C4FD8"/>
-          </a:solidFill>
-          <a:ln>
-            <a:noFill/>
-          </a:ln>
-          <a:effectLst/>
-        </p:spPr>
-        <p:style>
-          <a:lnRef idx="1">
-            <a:schemeClr val="accent1"/>
-          </a:lnRef>
-          <a:fillRef idx="3">
-            <a:schemeClr val="accent1"/>
-          </a:fillRef>
-          <a:effectRef idx="2">
-            <a:schemeClr val="accent1"/>
-          </a:effectRef>
-          <a:fontRef idx="minor">
-            <a:schemeClr val="lt1"/>
-          </a:fontRef>
-        </p:style>
-        <p:txBody>
-          <a:bodyPr rtlCol="0" anchor="ctr"/>
-          <a:lstStyle/>
-          <a:p>
-            <a:pPr algn="ctr"/>
-          </a:p>
-        </p:txBody>
-      </p:sp>
-      <p:sp>
-        <p:nvSpPr>
-          <p:cNvPr id="28" name="Rectangle 27"/>
-          <p:cNvSpPr/>
-          <p:nvPr/>
-        </p:nvSpPr>
-        <p:spPr>
-          <a:xfrm>
-            <a:off x="7580376" y="2487168"/>
-            <a:ext cx="1508760" cy="502920"/>
-          </a:xfrm>
-          <a:prstGeom prst="rect">
-            <a:avLst/>
-          </a:prstGeom>
-          <a:solidFill>
-            <a:srgbClr val="FFFFFF"/>
-          </a:solidFill>
-          <a:ln w="9525">
-            <a:solidFill>
-              <a:srgbClr val="D5DBE2"/>
-            </a:solidFill>
-          </a:ln>
-          <a:effectLst/>
-        </p:spPr>
-        <p:style>
-          <a:lnRef idx="1">
-            <a:schemeClr val="accent1"/>
-          </a:lnRef>
-          <a:fillRef idx="3">
-            <a:schemeClr val="accent1"/>
-          </a:fillRef>
-          <a:effectRef idx="2">
-            <a:schemeClr val="accent1"/>
-          </a:effectRef>
-          <a:fontRef idx="minor">
-            <a:schemeClr val="lt1"/>
-          </a:fontRef>
-        </p:style>
-        <p:txBody>
-          <a:bodyPr rtlCol="0" anchor="ctr" wrap="square" rIns="54864" tIns="0" bIns="0"/>
-          <a:lstStyle/>
-          <a:p>
-            <a:pPr algn="ctr">
-              <a:spcBef>
-                <a:spcPts val="0"/>
-              </a:spcBef>
-              <a:spcAft>
-                <a:spcPts val="0"/>
-              </a:spcAft>
-            </a:pPr>
-            <a:r>
-              <a:rPr sz="1200" b="1">
-                <a:solidFill>
-                  <a:srgbClr val="131A24"/>
-                </a:solidFill>
-                <a:latin typeface="Calibri"/>
-              </a:rPr>
-              <a:t>Rerank</a:t>
-            </a:r>
-          </a:p>
-          <a:p>
-            <a:pPr algn="ctr">
-              <a:spcBef>
-                <a:spcPts val="0"/>
-              </a:spcBef>
-              <a:spcAft>
-                <a:spcPts val="0"/>
-              </a:spcAft>
-            </a:pPr>
-            <a:r>
-              <a:rPr sz="900" b="0">
-                <a:solidFill>
-                  <a:srgbClr val="61707F"/>
-                </a:solidFill>
-                <a:latin typeface="Consolas"/>
-              </a:rPr>
-              <a:t>LTR / CE / LLM</a:t>
-            </a:r>
-          </a:p>
-        </p:txBody>
-      </p:sp>
-      <p:sp>
-        <p:nvSpPr>
-          <p:cNvPr id="29" name="Right Arrow 28"/>
-          <p:cNvSpPr/>
-          <p:nvPr/>
-        </p:nvSpPr>
-        <p:spPr>
-          <a:xfrm>
-            <a:off x="9107424" y="2670048"/>
-            <a:ext cx="164592" cy="128016"/>
-          </a:xfrm>
-          <a:prstGeom prst="rightArrow">
-            <a:avLst/>
-          </a:prstGeom>
-          <a:solidFill>
-            <a:srgbClr val="1C4FD8"/>
-          </a:solidFill>
-          <a:ln>
-            <a:noFill/>
-          </a:ln>
-          <a:effectLst/>
-        </p:spPr>
-        <p:style>
-          <a:lnRef idx="1">
-            <a:schemeClr val="accent1"/>
-          </a:lnRef>
-          <a:fillRef idx="3">
-            <a:schemeClr val="accent1"/>
-          </a:fillRef>
-          <a:effectRef idx="2">
-            <a:schemeClr val="accent1"/>
-          </a:effectRef>
-          <a:fontRef idx="minor">
-            <a:schemeClr val="lt1"/>
-          </a:fontRef>
-        </p:style>
-        <p:txBody>
-          <a:bodyPr rtlCol="0" anchor="ctr"/>
-          <a:lstStyle/>
-          <a:p>
-            <a:pPr algn="ctr"/>
+              <a:t>Keyword search finds the exact words. Meaning search finds the same idea worded differently. Patents need both.</a:t>
+            </a:r>
           </a:p>
         </p:txBody>
       </p:sp>
@@ -7420,89 +6786,8 @@
         </p:nvSpPr>
         <p:spPr>
           <a:xfrm>
-            <a:off x="9290304" y="2487168"/>
-            <a:ext cx="1417320" cy="502920"/>
-          </a:xfrm>
-          <a:prstGeom prst="rect">
-            <a:avLst/>
-          </a:prstGeom>
-          <a:solidFill>
-            <a:srgbClr val="FFFFFF"/>
-          </a:solidFill>
-          <a:ln w="9525">
-            <a:solidFill>
-              <a:srgbClr val="D5DBE2"/>
-            </a:solidFill>
-          </a:ln>
-          <a:effectLst/>
-        </p:spPr>
-        <p:style>
-          <a:lnRef idx="1">
-            <a:schemeClr val="accent1"/>
-          </a:lnRef>
-          <a:fillRef idx="3">
-            <a:schemeClr val="accent1"/>
-          </a:fillRef>
-          <a:effectRef idx="2">
-            <a:schemeClr val="accent1"/>
-          </a:effectRef>
-          <a:fontRef idx="minor">
-            <a:schemeClr val="lt1"/>
-          </a:fontRef>
-        </p:style>
-        <p:txBody>
-          <a:bodyPr rtlCol="0" anchor="ctr" wrap="square" rIns="54864" tIns="0" bIns="0"/>
-          <a:lstStyle/>
-          <a:p>
-            <a:pPr algn="ctr">
-              <a:spcBef>
-                <a:spcPts val="0"/>
-              </a:spcBef>
-              <a:spcAft>
-                <a:spcPts val="0"/>
-              </a:spcAft>
-            </a:pPr>
-            <a:r>
-              <a:rPr sz="1200" b="1">
-                <a:solidFill>
-                  <a:srgbClr val="131A24"/>
-                </a:solidFill>
-                <a:latin typeface="Calibri"/>
-              </a:rPr>
-              <a:t>Group</a:t>
-            </a:r>
-          </a:p>
-          <a:p>
-            <a:pPr algn="ctr">
-              <a:spcBef>
-                <a:spcPts val="0"/>
-              </a:spcBef>
-              <a:spcAft>
-                <a:spcPts val="0"/>
-              </a:spcAft>
-            </a:pPr>
-            <a:r>
-              <a:rPr sz="900" b="0">
-                <a:solidFill>
-                  <a:srgbClr val="61707F"/>
-                </a:solidFill>
-                <a:latin typeface="Consolas"/>
-              </a:rPr>
-              <a:t>by patent</a:t>
-            </a:r>
-          </a:p>
-        </p:txBody>
-      </p:sp>
-      <p:sp>
-        <p:nvSpPr>
-          <p:cNvPr id="31" name="Rectangle 30"/>
-          <p:cNvSpPr/>
-          <p:nvPr/>
-        </p:nvSpPr>
-        <p:spPr>
-          <a:xfrm>
-            <a:off x="566928" y="3401568"/>
-            <a:ext cx="5391759" cy="868680"/>
+            <a:off x="6255867" y="3236976"/>
+            <a:ext cx="5368899" cy="914400"/>
           </a:xfrm>
           <a:prstGeom prst="rect">
             <a:avLst/>
@@ -7539,14 +6824,14 @@
       </p:sp>
       <p:sp>
         <p:nvSpPr>
-          <p:cNvPr id="32" name="Rectangle 31"/>
+          <p:cNvPr id="31" name="Rectangle 30"/>
           <p:cNvSpPr/>
           <p:nvPr/>
         </p:nvSpPr>
         <p:spPr>
           <a:xfrm>
-            <a:off x="566928" y="3401568"/>
-            <a:ext cx="38100" cy="868680"/>
+            <a:off x="6255867" y="3236976"/>
+            <a:ext cx="38100" cy="914400"/>
           </a:xfrm>
           <a:prstGeom prst="rect">
             <a:avLst/>
@@ -7583,14 +6868,14 @@
       </p:sp>
       <p:sp>
         <p:nvSpPr>
-          <p:cNvPr id="33" name="TextBox 32"/>
+          <p:cNvPr id="32" name="TextBox 31"/>
           <p:cNvSpPr txBox="1"/>
           <p:nvPr/>
         </p:nvSpPr>
         <p:spPr>
           <a:xfrm>
-            <a:off x="713232" y="3511296"/>
-            <a:ext cx="5117439" cy="685800"/>
+            <a:off x="6402171" y="3346704"/>
+            <a:ext cx="5094579" cy="731520"/>
           </a:xfrm>
           <a:prstGeom prst="rect">
             <a:avLst/>
@@ -7618,7 +6903,7 @@
                 </a:solidFill>
                 <a:latin typeface="Calibri"/>
               </a:rPr>
-              <a:t>Why both retrievers</a:t>
+              <a:t>Why narrow first, not last</a:t>
             </a:r>
           </a:p>
           <a:p>
@@ -7640,27 +6925,27 @@
                 </a:solidFill>
                 <a:latin typeface="Calibri"/>
               </a:rPr>
-              <a:t>BM25 nails exact component names, materials and legal phrasing. Vectors catch the same mechanism in different words.</a:t>
-            </a:r>
-          </a:p>
-        </p:txBody>
-      </p:sp>
-      <p:sp>
-        <p:nvSpPr>
-          <p:cNvPr id="34" name="Rectangle 33"/>
+              <a:t>Filtering before the search is what keeps it fast at scale — and still returns a full set of candidates.</a:t>
+            </a:r>
+          </a:p>
+        </p:txBody>
+      </p:sp>
+      <p:sp>
+        <p:nvSpPr>
+          <p:cNvPr id="33" name="Rectangle 32"/>
           <p:cNvSpPr/>
           <p:nvPr/>
         </p:nvSpPr>
         <p:spPr>
           <a:xfrm>
-            <a:off x="6233007" y="3401568"/>
-            <a:ext cx="5391759" cy="868680"/>
+            <a:off x="566928" y="4562856"/>
+            <a:ext cx="11057839" cy="9525"/>
           </a:xfrm>
           <a:prstGeom prst="rect">
             <a:avLst/>
           </a:prstGeom>
           <a:solidFill>
-            <a:srgbClr val="E6ECFD"/>
+            <a:srgbClr val="D5DBE2"/>
           </a:solidFill>
           <a:ln>
             <a:noFill/>
@@ -7682,7 +6967,7 @@
           </a:fontRef>
         </p:style>
         <p:txBody>
-          <a:bodyPr rtlCol="0" anchor="ctr" wrap="square"/>
+          <a:bodyPr rtlCol="0" anchor="ctr"/>
           <a:lstStyle/>
           <a:p>
             <a:pPr algn="ctr"/>
@@ -7691,58 +6976,14 @@
       </p:sp>
       <p:sp>
         <p:nvSpPr>
-          <p:cNvPr id="35" name="Rectangle 34"/>
-          <p:cNvSpPr/>
-          <p:nvPr/>
-        </p:nvSpPr>
-        <p:spPr>
-          <a:xfrm>
-            <a:off x="6233007" y="3401568"/>
-            <a:ext cx="38100" cy="868680"/>
-          </a:xfrm>
-          <a:prstGeom prst="rect">
-            <a:avLst/>
-          </a:prstGeom>
-          <a:solidFill>
-            <a:srgbClr val="1C4FD8"/>
-          </a:solidFill>
-          <a:ln>
-            <a:noFill/>
-          </a:ln>
-          <a:effectLst/>
-        </p:spPr>
-        <p:style>
-          <a:lnRef idx="1">
-            <a:schemeClr val="accent1"/>
-          </a:lnRef>
-          <a:fillRef idx="3">
-            <a:schemeClr val="accent1"/>
-          </a:fillRef>
-          <a:effectRef idx="2">
-            <a:schemeClr val="accent1"/>
-          </a:effectRef>
-          <a:fontRef idx="minor">
-            <a:schemeClr val="lt1"/>
-          </a:fontRef>
-        </p:style>
-        <p:txBody>
-          <a:bodyPr rtlCol="0" anchor="ctr" wrap="square"/>
-          <a:lstStyle/>
-          <a:p>
-            <a:pPr algn="ctr"/>
-          </a:p>
-        </p:txBody>
-      </p:sp>
-      <p:sp>
-        <p:nvSpPr>
-          <p:cNvPr id="36" name="TextBox 35"/>
+          <p:cNvPr id="34" name="TextBox 33"/>
           <p:cNvSpPr txBox="1"/>
           <p:nvPr/>
         </p:nvSpPr>
         <p:spPr>
           <a:xfrm>
-            <a:off x="6379311" y="3511296"/>
-            <a:ext cx="5117439" cy="685800"/>
+            <a:off x="566928" y="4818888"/>
+            <a:ext cx="11057839" cy="822960"/>
           </a:xfrm>
           <a:prstGeom prst="rect">
             <a:avLst/>
@@ -7760,23 +7001,23 @@
                 <a:spcPts val="0"/>
               </a:spcBef>
               <a:spcAft>
-                <a:spcPts val="400"/>
+                <a:spcPts val="800"/>
               </a:spcAft>
             </a:pPr>
             <a:r>
-              <a:rPr sz="1200" b="1">
+              <a:rPr sz="1500" b="1">
                 <a:solidFill>
                   <a:srgbClr val="131A24"/>
                 </a:solidFill>
                 <a:latin typeface="Calibri"/>
               </a:rPr>
-              <a:t>Why RRF, not score addition</a:t>
+              <a:t>One engine, OpenSearch, does keyword search, vector search and filtering in a single query.</a:t>
             </a:r>
           </a:p>
           <a:p>
             <a:pPr algn="l">
               <a:lnSpc>
-                <a:spcPct val="120000"/>
+                <a:spcPct val="130000"/>
               </a:lnSpc>
               <a:spcBef>
                 <a:spcPts val="0"/>
@@ -7786,254 +7027,13 @@
               </a:spcAft>
             </a:pPr>
             <a:r>
-              <a:rPr sz="1100" b="0">
+              <a:rPr sz="1300" b="0">
                 <a:solidFill>
                   <a:srgbClr val="35424F"/>
                 </a:solidFill>
                 <a:latin typeface="Calibri"/>
               </a:rPr>
-              <a:t>BM25 scores sit in the tens, cosine in 0–1. RRF is scale-free and needs no tuned weight.</a:t>
-            </a:r>
-          </a:p>
-        </p:txBody>
-      </p:sp>
-      <p:sp>
-        <p:nvSpPr>
-          <p:cNvPr id="37" name="Rectangle 36"/>
-          <p:cNvSpPr/>
-          <p:nvPr/>
-        </p:nvSpPr>
-        <p:spPr>
-          <a:xfrm>
-            <a:off x="566928" y="4453128"/>
-            <a:ext cx="11057839" cy="621792"/>
-          </a:xfrm>
-          <a:prstGeom prst="rect">
-            <a:avLst/>
-          </a:prstGeom>
-          <a:solidFill>
-            <a:srgbClr val="E3F2E9"/>
-          </a:solidFill>
-          <a:ln>
-            <a:noFill/>
-          </a:ln>
-          <a:effectLst/>
-        </p:spPr>
-        <p:style>
-          <a:lnRef idx="1">
-            <a:schemeClr val="accent1"/>
-          </a:lnRef>
-          <a:fillRef idx="3">
-            <a:schemeClr val="accent1"/>
-          </a:fillRef>
-          <a:effectRef idx="2">
-            <a:schemeClr val="accent1"/>
-          </a:effectRef>
-          <a:fontRef idx="minor">
-            <a:schemeClr val="lt1"/>
-          </a:fontRef>
-        </p:style>
-        <p:txBody>
-          <a:bodyPr rtlCol="0" anchor="ctr" wrap="square"/>
-          <a:lstStyle/>
-          <a:p>
-            <a:pPr algn="ctr"/>
-          </a:p>
-        </p:txBody>
-      </p:sp>
-      <p:sp>
-        <p:nvSpPr>
-          <p:cNvPr id="38" name="Rectangle 37"/>
-          <p:cNvSpPr/>
-          <p:nvPr/>
-        </p:nvSpPr>
-        <p:spPr>
-          <a:xfrm>
-            <a:off x="566928" y="4453128"/>
-            <a:ext cx="38100" cy="621792"/>
-          </a:xfrm>
-          <a:prstGeom prst="rect">
-            <a:avLst/>
-          </a:prstGeom>
-          <a:solidFill>
-            <a:srgbClr val="15683C"/>
-          </a:solidFill>
-          <a:ln>
-            <a:noFill/>
-          </a:ln>
-          <a:effectLst/>
-        </p:spPr>
-        <p:style>
-          <a:lnRef idx="1">
-            <a:schemeClr val="accent1"/>
-          </a:lnRef>
-          <a:fillRef idx="3">
-            <a:schemeClr val="accent1"/>
-          </a:fillRef>
-          <a:effectRef idx="2">
-            <a:schemeClr val="accent1"/>
-          </a:effectRef>
-          <a:fontRef idx="minor">
-            <a:schemeClr val="lt1"/>
-          </a:fontRef>
-        </p:style>
-        <p:txBody>
-          <a:bodyPr rtlCol="0" anchor="ctr" wrap="square"/>
-          <a:lstStyle/>
-          <a:p>
-            <a:pPr algn="ctr"/>
-          </a:p>
-        </p:txBody>
-      </p:sp>
-      <p:sp>
-        <p:nvSpPr>
-          <p:cNvPr id="39" name="TextBox 38"/>
-          <p:cNvSpPr txBox="1"/>
-          <p:nvPr/>
-        </p:nvSpPr>
-        <p:spPr>
-          <a:xfrm>
-            <a:off x="713232" y="4562856"/>
-            <a:ext cx="10783519" cy="438912"/>
-          </a:xfrm>
-          <a:prstGeom prst="rect">
-            <a:avLst/>
-          </a:prstGeom>
-          <a:noFill/>
-        </p:spPr>
-        <p:txBody>
-          <a:bodyPr wrap="square" anchor="t" lIns="0" rIns="0" tIns="0" bIns="0">
-            <a:spAutoFit/>
-          </a:bodyPr>
-          <a:lstStyle/>
-          <a:p>
-            <a:pPr algn="l">
-              <a:lnSpc>
-                <a:spcPct val="120000"/>
-              </a:lnSpc>
-              <a:spcBef>
-                <a:spcPts val="0"/>
-              </a:spcBef>
-              <a:spcAft>
-                <a:spcPts val="0"/>
-              </a:spcAft>
-            </a:pPr>
-            <a:r>
-              <a:rPr sz="1100" b="0">
-                <a:solidFill>
-                  <a:srgbClr val="35424F"/>
-                </a:solidFill>
-                <a:latin typeface="Calibri"/>
-              </a:rPr>
-              <a:t>Filters are pre-filters applied inside k-NN graph traversal. Post-filtering would return far fewer than k under a selective constraint. Verified: with B60B applied, dense and hybrid still return a full 50/50.</a:t>
-            </a:r>
-          </a:p>
-        </p:txBody>
-      </p:sp>
-      <p:sp>
-        <p:nvSpPr>
-          <p:cNvPr id="40" name="TextBox 39"/>
-          <p:cNvSpPr txBox="1"/>
-          <p:nvPr/>
-        </p:nvSpPr>
-        <p:spPr>
-          <a:xfrm>
-            <a:off x="566928" y="5221224"/>
-            <a:ext cx="11057839" cy="822960"/>
-          </a:xfrm>
-          <a:prstGeom prst="rect">
-            <a:avLst/>
-          </a:prstGeom>
-          <a:noFill/>
-        </p:spPr>
-        <p:txBody>
-          <a:bodyPr wrap="square" anchor="t" lIns="0" rIns="0" tIns="0" bIns="0">
-            <a:spAutoFit/>
-          </a:bodyPr>
-          <a:lstStyle/>
-          <a:p>
-            <a:pPr algn="l">
-              <a:spcBef>
-                <a:spcPts val="0"/>
-              </a:spcBef>
-              <a:spcAft>
-                <a:spcPts val="600"/>
-              </a:spcAft>
-            </a:pPr>
-            <a:r>
-              <a:rPr sz="1000" b="1">
-                <a:solidFill>
-                  <a:srgbClr val="1C4FD8"/>
-                </a:solidFill>
-                <a:latin typeface="Consolas"/>
-              </a:rPr>
-              <a:t>EVERY MODEL IS SWAPPABLE BY FLAG — NO CODE CHANGE</a:t>
-            </a:r>
-          </a:p>
-          <a:p>
-            <a:pPr algn="l">
-              <a:lnSpc>
-                <a:spcPct val="115000"/>
-              </a:lnSpc>
-              <a:spcBef>
-                <a:spcPts val="0"/>
-              </a:spcBef>
-              <a:spcAft>
-                <a:spcPts val="300"/>
-              </a:spcAft>
-            </a:pPr>
-            <a:r>
-              <a:rPr sz="1150" b="0">
-                <a:solidFill>
-                  <a:srgbClr val="35424F"/>
-                </a:solidFill>
-                <a:latin typeface="Calibri"/>
-              </a:rPr>
-              <a:t>— Embeddings — all-MiniLM / bge / e5 / gte local, or OpenAI hosted</a:t>
-            </a:r>
-          </a:p>
-          <a:p>
-            <a:pPr algn="l">
-              <a:lnSpc>
-                <a:spcPct val="115000"/>
-              </a:lnSpc>
-              <a:spcBef>
-                <a:spcPts val="0"/>
-              </a:spcBef>
-              <a:spcAft>
-                <a:spcPts val="300"/>
-              </a:spcAft>
-            </a:pPr>
-            <a:r>
-              <a:rPr sz="1150" b="0">
-                <a:solidFill>
-                  <a:srgbClr val="35424F"/>
-                </a:solidFill>
-                <a:latin typeface="Calibri"/>
-              </a:rPr>
-              <a:t>— Reranker — trained LTR, HuggingFace cross-encoder, LLM, or off</a:t>
-            </a:r>
-          </a:p>
-          <a:p>
-            <a:pPr algn="l">
-              <a:lnSpc>
-                <a:spcPct val="115000"/>
-              </a:lnSpc>
-              <a:spcBef>
-                <a:spcPts val="0"/>
-              </a:spcBef>
-              <a:spcAft>
-                <a:spcPts val="300"/>
-              </a:spcAft>
-            </a:pPr>
-            <a:r>
-              <a:rPr sz="1150" b="0">
-                <a:solidFill>
-                  <a:srgbClr val="35424F"/>
-                </a:solidFill>
-                <a:latin typeface="Calibri"/>
-              </a:rPr>
-              <a:t>— Vocabulary — config/synonyms.txt, edit and reindex</a:t>
+              <a:t>The embedding model and the re-ranker are each chosen by a command-line flag — swapping either changes no code.</a:t>
             </a:r>
           </a:p>
         </p:txBody>
@@ -8580,7 +7580,7 @@
         <p:spPr>
           <a:xfrm>
             <a:off x="566928" y="2916936"/>
-            <a:ext cx="10241280" cy="365760"/>
+            <a:ext cx="10607040" cy="365760"/>
           </a:xfrm>
           <a:prstGeom prst="rect">
             <a:avLst/>
@@ -8605,16 +7605,16 @@
               </a:spcAft>
             </a:pPr>
             <a:r>
-              <a:rPr sz="1250" b="0">
+              <a:rPr sz="1500" b="0">
                 <a:solidFill>
                   <a:srgbClr val="35424F"/>
                 </a:solidFill>
                 <a:latin typeface="Calibri"/>
               </a:rPr>
-              <a:t>Preambles are </a:t>
-            </a:r>
-            <a:r>
-              <a:rPr sz="1250" b="1">
+              <a:t>Claim preambles are </a:t>
+            </a:r>
+            <a:r>
+              <a:rPr sz="1500" b="1">
                 <a:solidFill>
                   <a:srgbClr val="131A24"/>
                 </a:solidFill>
@@ -8623,13 +7623,13 @@
               <a:t>stripped, not split</a:t>
             </a:r>
             <a:r>
-              <a:rPr sz="1250" b="0">
+              <a:rPr sz="1500" b="0">
                 <a:solidFill>
                   <a:srgbClr val="35424F"/>
                 </a:solidFill>
                 <a:latin typeface="Calibri"/>
               </a:rPr>
-              <a:t>.  Patent 20240051333 (“SPOKE”) opens mid-sentence — the “1 . A spoke comprising:” is simply gone.</a:t>
+              <a:t> — the text is gone, not moved.</a:t>
             </a:r>
           </a:p>
         </p:txBody>
@@ -8642,160 +7642,8 @@
         </p:nvSpPr>
         <p:spPr>
           <a:xfrm>
-            <a:off x="566928" y="3374136"/>
-            <a:ext cx="11057839" cy="713232"/>
-          </a:xfrm>
-          <a:prstGeom prst="rect">
-            <a:avLst/>
-          </a:prstGeom>
-          <a:solidFill>
-            <a:srgbClr val="FBF0E2"/>
-          </a:solidFill>
-          <a:ln>
-            <a:noFill/>
-          </a:ln>
-          <a:effectLst/>
-        </p:spPr>
-        <p:style>
-          <a:lnRef idx="1">
-            <a:schemeClr val="accent1"/>
-          </a:lnRef>
-          <a:fillRef idx="3">
-            <a:schemeClr val="accent1"/>
-          </a:fillRef>
-          <a:effectRef idx="2">
-            <a:schemeClr val="accent1"/>
-          </a:effectRef>
-          <a:fontRef idx="minor">
-            <a:schemeClr val="lt1"/>
-          </a:fontRef>
-        </p:style>
-        <p:txBody>
-          <a:bodyPr rtlCol="0" anchor="ctr" wrap="square"/>
-          <a:lstStyle/>
-          <a:p>
-            <a:pPr algn="ctr"/>
-          </a:p>
-        </p:txBody>
-      </p:sp>
-      <p:sp>
-        <p:nvSpPr>
-          <p:cNvPr id="14" name="Rectangle 13"/>
-          <p:cNvSpPr/>
-          <p:nvPr/>
-        </p:nvSpPr>
-        <p:spPr>
-          <a:xfrm>
-            <a:off x="566928" y="3374136"/>
-            <a:ext cx="38100" cy="713232"/>
-          </a:xfrm>
-          <a:prstGeom prst="rect">
-            <a:avLst/>
-          </a:prstGeom>
-          <a:solidFill>
-            <a:srgbClr val="A4530B"/>
-          </a:solidFill>
-          <a:ln>
-            <a:noFill/>
-          </a:ln>
-          <a:effectLst/>
-        </p:spPr>
-        <p:style>
-          <a:lnRef idx="1">
-            <a:schemeClr val="accent1"/>
-          </a:lnRef>
-          <a:fillRef idx="3">
-            <a:schemeClr val="accent1"/>
-          </a:fillRef>
-          <a:effectRef idx="2">
-            <a:schemeClr val="accent1"/>
-          </a:effectRef>
-          <a:fontRef idx="minor">
-            <a:schemeClr val="lt1"/>
-          </a:fontRef>
-        </p:style>
-        <p:txBody>
-          <a:bodyPr rtlCol="0" anchor="ctr" wrap="square"/>
-          <a:lstStyle/>
-          <a:p>
-            <a:pPr algn="ctr"/>
-          </a:p>
-        </p:txBody>
-      </p:sp>
-      <p:sp>
-        <p:nvSpPr>
-          <p:cNvPr id="15" name="TextBox 14"/>
-          <p:cNvSpPr txBox="1"/>
-          <p:nvPr/>
-        </p:nvSpPr>
-        <p:spPr>
-          <a:xfrm>
-            <a:off x="713232" y="3483864"/>
-            <a:ext cx="10783519" cy="530352"/>
-          </a:xfrm>
-          <a:prstGeom prst="rect">
-            <a:avLst/>
-          </a:prstGeom>
-          <a:noFill/>
-        </p:spPr>
-        <p:txBody>
-          <a:bodyPr wrap="square" anchor="t" lIns="0" rIns="0" tIns="0" bIns="0">
-            <a:spAutoFit/>
-          </a:bodyPr>
-          <a:lstStyle/>
-          <a:p>
-            <a:pPr algn="l">
-              <a:spcBef>
-                <a:spcPts val="0"/>
-              </a:spcBef>
-              <a:spcAft>
-                <a:spcPts val="400"/>
-              </a:spcAft>
-            </a:pPr>
-            <a:r>
-              <a:rPr sz="1200" b="1">
-                <a:solidFill>
-                  <a:srgbClr val="131A24"/>
-                </a:solidFill>
-                <a:latin typeface="Calibri"/>
-              </a:rPr>
-              <a:t>Why the obvious rule fails</a:t>
-            </a:r>
-          </a:p>
-          <a:p>
-            <a:pPr algn="l">
-              <a:lnSpc>
-                <a:spcPct val="120000"/>
-              </a:lnSpc>
-              <a:spcBef>
-                <a:spcPts val="0"/>
-              </a:spcBef>
-              <a:spcAft>
-                <a:spcPts val="0"/>
-              </a:spcAft>
-            </a:pPr>
-            <a:r>
-              <a:rPr sz="1100" b="0">
-                <a:solidFill>
-                  <a:srgbClr val="35424F"/>
-                </a:solidFill>
-                <a:latin typeface="Calibri"/>
-              </a:rPr>
-              <a:t>“Append every numberless fragment to the previous claim” breaks twice: nothing precedes an index-0 fragment, so claim 1 is dropped; and mid-list fragments are often new independent claims, glued onto their predecessor.</a:t>
-            </a:r>
-          </a:p>
-        </p:txBody>
-      </p:sp>
-      <p:sp>
-        <p:nvSpPr>
-          <p:cNvPr id="16" name="Rectangle 15"/>
-          <p:cNvSpPr/>
-          <p:nvPr/>
-        </p:nvSpPr>
-        <p:spPr>
-          <a:xfrm>
-            <a:off x="566928" y="4233672"/>
-            <a:ext cx="11057839" cy="786384"/>
+            <a:off x="566928" y="3419856"/>
+            <a:ext cx="11057839" cy="841248"/>
           </a:xfrm>
           <a:prstGeom prst="rect">
             <a:avLst/>
@@ -8834,14 +7682,14 @@
       </p:sp>
       <p:sp>
         <p:nvSpPr>
-          <p:cNvPr id="17" name="TextBox 16"/>
+          <p:cNvPr id="14" name="TextBox 13"/>
           <p:cNvSpPr txBox="1"/>
           <p:nvPr/>
         </p:nvSpPr>
         <p:spPr>
           <a:xfrm>
-            <a:off x="713232" y="4343400"/>
-            <a:ext cx="10783519" cy="603504"/>
+            <a:off x="713232" y="3529584"/>
+            <a:ext cx="10783519" cy="658368"/>
           </a:xfrm>
           <a:prstGeom prst="rect">
             <a:avLst/>
@@ -8872,7 +7720,7 @@
                 </a:solidFill>
                 <a:latin typeface="Consolas"/>
               </a:rPr>
-              <a:t>20240051338, entry 1:</a:t>
+              <a:t>The obvious fix: append each numberless fragment to the previous claim.</a:t>
             </a:r>
           </a:p>
           <a:p>
@@ -8916,7 +7764,7 @@
                 </a:solidFill>
                 <a:latin typeface="Consolas"/>
               </a:rPr>
-              <a:t>  FRAG: 'a tread portion extending in a tire circumferential direction...'</a:t>
+              <a:t>  FRAG: 'a tread portion extending in a tire circumferential...'</a:t>
             </a:r>
           </a:p>
           <a:p>
@@ -8938,21 +7786,21 @@
                 </a:solidFill>
                 <a:latin typeface="Consolas"/>
               </a:rPr>
-              <a:t>                                                    ^^ this is claim 6</a:t>
-            </a:r>
-          </a:p>
-        </p:txBody>
-      </p:sp>
-      <p:sp>
-        <p:nvSpPr>
-          <p:cNvPr id="18" name="TextBox 17"/>
+              <a:t>                                          ^^ a new claim 6, not a continuation</a:t>
+            </a:r>
+          </a:p>
+        </p:txBody>
+      </p:sp>
+      <p:sp>
+        <p:nvSpPr>
+          <p:cNvPr id="15" name="TextBox 14"/>
           <p:cNvSpPr txBox="1"/>
           <p:nvPr/>
         </p:nvSpPr>
         <p:spPr>
           <a:xfrm>
-            <a:off x="566928" y="5166360"/>
-            <a:ext cx="5391759" cy="1188720"/>
+            <a:off x="566928" y="4443984"/>
+            <a:ext cx="5368899" cy="914400"/>
           </a:xfrm>
           <a:prstGeom prst="rect">
             <a:avLst/>
@@ -8970,23 +7818,23 @@
                 <a:spcPts val="0"/>
               </a:spcBef>
               <a:spcAft>
-                <a:spcPts val="500"/>
+                <a:spcPts val="600"/>
               </a:spcAft>
             </a:pPr>
             <a:r>
-              <a:rPr sz="1300" b="1">
+              <a:rPr sz="1500" b="1">
                 <a:solidFill>
                   <a:srgbClr val="131A24"/>
                 </a:solidFill>
                 <a:latin typeface="Calibri"/>
               </a:rPr>
-              <a:t>The rule used instead</a:t>
-            </a:r>
-          </a:p>
-          <a:p>
-            <a:pPr>
+              <a:t>Segment first, number second</a:t>
+            </a:r>
+          </a:p>
+          <a:p>
+            <a:pPr algn="l">
               <a:lnSpc>
-                <a:spcPct val="125000"/>
+                <a:spcPct val="130000"/>
               </a:lnSpc>
               <a:spcBef>
                 <a:spcPts val="0"/>
@@ -8996,36 +7844,27 @@
               </a:spcAft>
             </a:pPr>
             <a:r>
-              <a:rPr sz="1150" b="1">
-                <a:solidFill>
-                  <a:srgbClr val="131A24"/>
+              <a:rPr sz="1250" b="0">
+                <a:solidFill>
+                  <a:srgbClr val="35424F"/>
                 </a:solidFill>
                 <a:latin typeface="Calibri"/>
               </a:rPr>
-              <a:t>Segment first, number second. </a:t>
-            </a:r>
-            <a:r>
-              <a:rPr sz="1150" b="0">
-                <a:solidFill>
-                  <a:srgbClr val="35424F"/>
-                </a:solidFill>
-                <a:latin typeface="Calibri"/>
-              </a:rPr>
-              <a:t>A fragment starts a new claim if it is first, or if the previous entry closed on a full stop. Numbers resolve afterwards by anchoring to the next explicit number. Every uncertain decision is recorded on the claim, so the UI shows provenance instead of pretending the data was clean.</a:t>
-            </a:r>
-          </a:p>
-        </p:txBody>
-      </p:sp>
-      <p:sp>
-        <p:nvSpPr>
-          <p:cNvPr id="19" name="Rectangle 18"/>
+              <a:t>A fragment starts a new claim if it is first, or if the previous entry ended on a full stop. Numbers resolve afterwards.</a:t>
+            </a:r>
+          </a:p>
+        </p:txBody>
+      </p:sp>
+      <p:sp>
+        <p:nvSpPr>
+          <p:cNvPr id="16" name="Rectangle 15"/>
           <p:cNvSpPr/>
           <p:nvPr/>
         </p:nvSpPr>
         <p:spPr>
           <a:xfrm>
-            <a:off x="6233007" y="5166360"/>
-            <a:ext cx="5391759" cy="749808"/>
+            <a:off x="6255867" y="4443984"/>
+            <a:ext cx="5368899" cy="914400"/>
           </a:xfrm>
           <a:prstGeom prst="rect">
             <a:avLst/>
@@ -9062,14 +7901,14 @@
       </p:sp>
       <p:sp>
         <p:nvSpPr>
-          <p:cNvPr id="20" name="Rectangle 19"/>
+          <p:cNvPr id="17" name="Rectangle 16"/>
           <p:cNvSpPr/>
           <p:nvPr/>
         </p:nvSpPr>
         <p:spPr>
           <a:xfrm>
-            <a:off x="6233007" y="5166360"/>
-            <a:ext cx="38100" cy="749808"/>
+            <a:off x="6255867" y="4443984"/>
+            <a:ext cx="38100" cy="914400"/>
           </a:xfrm>
           <a:prstGeom prst="rect">
             <a:avLst/>
@@ -9106,14 +7945,14 @@
       </p:sp>
       <p:sp>
         <p:nvSpPr>
-          <p:cNvPr id="21" name="TextBox 20"/>
+          <p:cNvPr id="18" name="TextBox 17"/>
           <p:cNvSpPr txBox="1"/>
           <p:nvPr/>
         </p:nvSpPr>
         <p:spPr>
           <a:xfrm>
-            <a:off x="6379311" y="5276088"/>
-            <a:ext cx="5117439" cy="566928"/>
+            <a:off x="6402171" y="4553712"/>
+            <a:ext cx="5094579" cy="731520"/>
           </a:xfrm>
           <a:prstGeom prst="rect">
             <a:avLst/>
@@ -9125,6 +7964,25 @@
             <a:spAutoFit/>
           </a:bodyPr>
           <a:lstStyle/>
+          <a:p>
+            <a:pPr algn="l">
+              <a:spcBef>
+                <a:spcPts val="0"/>
+              </a:spcBef>
+              <a:spcAft>
+                <a:spcPts val="400"/>
+              </a:spcAft>
+            </a:pPr>
+            <a:r>
+              <a:rPr sz="1200" b="1">
+                <a:solidFill>
+                  <a:srgbClr val="131A24"/>
+                </a:solidFill>
+                <a:latin typeface="Calibri"/>
+              </a:rPr>
+              <a:t>How we know it is right</a:t>
+            </a:r>
+          </a:p>
           <a:p>
             <a:pPr algn="l">
               <a:lnSpc>
@@ -9144,52 +8002,7 @@
                 </a:solidFill>
                 <a:latin typeface="Calibri"/>
               </a:rPr>
-              <a:t>Invariant, checked over the whole corpus: all 10,578 source entries are consumed exactly once — zero dropped, zero duplicated.</a:t>
-            </a:r>
-          </a:p>
-        </p:txBody>
-      </p:sp>
-      <p:sp>
-        <p:nvSpPr>
-          <p:cNvPr id="22" name="TextBox 21"/>
-          <p:cNvSpPr txBox="1"/>
-          <p:nvPr/>
-        </p:nvSpPr>
-        <p:spPr>
-          <a:xfrm>
-            <a:off x="6342735" y="6035040"/>
-            <a:ext cx="5172303" cy="548640"/>
-          </a:xfrm>
-          <a:prstGeom prst="rect">
-            <a:avLst/>
-          </a:prstGeom>
-          <a:noFill/>
-        </p:spPr>
-        <p:txBody>
-          <a:bodyPr wrap="square" anchor="t" lIns="0" rIns="0" tIns="0" bIns="0">
-            <a:spAutoFit/>
-          </a:bodyPr>
-          <a:lstStyle/>
-          <a:p>
-            <a:pPr algn="l">
-              <a:lnSpc>
-                <a:spcPct val="120000"/>
-              </a:lnSpc>
-              <a:spcBef>
-                <a:spcPts val="0"/>
-              </a:spcBef>
-              <a:spcAft>
-                <a:spcPts val="0"/>
-              </a:spcAft>
-            </a:pPr>
-            <a:r>
-              <a:rPr sz="1100" b="0">
-                <a:solidFill>
-                  <a:srgbClr val="35424F"/>
-                </a:solidFill>
-                <a:latin typeface="Calibri"/>
-              </a:rPr>
-              <a:t>Tests also cover formats absent from this dataset — “1)” numbering, em-dash cancellation ranges, 120-claim patents — so the parser is not fitted to one sample.</a:t>
+              <a:t>All 10,578 source entries are consumed exactly once. Zero dropped, zero duplicated.</a:t>
             </a:r>
           </a:p>
         </p:txBody>
@@ -9928,7 +8741,7 @@
         <p:spPr>
           <a:xfrm>
             <a:off x="566928" y="2761488"/>
-            <a:ext cx="11057839" cy="658368"/>
+            <a:ext cx="11057839" cy="457200"/>
           </a:xfrm>
           <a:prstGeom prst="rect">
             <a:avLst/>
@@ -9943,7 +8756,7 @@
           <a:p>
             <a:pPr>
               <a:lnSpc>
-                <a:spcPct val="125000"/>
+                <a:spcPct val="130000"/>
               </a:lnSpc>
               <a:spcBef>
                 <a:spcPts val="0"/>
@@ -9953,40 +8766,22 @@
               </a:spcAft>
             </a:pPr>
             <a:r>
-              <a:rPr sz="1200" b="1">
+              <a:rPr sz="1400" b="1">
                 <a:solidFill>
                   <a:srgbClr val="131A24"/>
                 </a:solidFill>
                 <a:latin typeface="Calibri"/>
               </a:rPr>
-              <a:t>Attempt 1 </a:t>
-            </a:r>
-            <a:r>
-              <a:rPr sz="1200" b="0">
+              <a:t>The flaw: </a:t>
+            </a:r>
+            <a:r>
+              <a:rPr sz="1400" b="0">
                 <a:solidFill>
                   <a:srgbClr val="35424F"/>
                 </a:solidFill>
                 <a:latin typeface="Calibri"/>
               </a:rPr>
-              <a:t>used each patent's own abstract — same drafter, same vocabulary, so 55% of query words appear verbatim in the target and the benchmark rewarded near-duplicate detection. </a:t>
-            </a:r>
-            <a:r>
-              <a:rPr sz="1200" b="1">
-                <a:solidFill>
-                  <a:srgbClr val="131A24"/>
-                </a:solidFill>
-                <a:latin typeface="Calibri"/>
-              </a:rPr>
-              <a:t>Attempt 3 </a:t>
-            </a:r>
-            <a:r>
-              <a:rPr sz="1200" b="0">
-                <a:solidFill>
-                  <a:srgbClr val="35424F"/>
-                </a:solidFill>
-                <a:latin typeface="Calibri"/>
-              </a:rPr>
-              <a:t>found the real flaw: qrels marked only the query's own patent relevant, so when hybrid correctly returned five different flexible-spoke patents, four scored as errors. Pooling surfaced 1,272 cross-patent relevant records the earlier sets counted as mistakes.</a:t>
+              <a:t>the answer key marked only the query's own patent as relevant — so five correct flexible-spoke patents scored as four errors.</a:t>
             </a:r>
           </a:p>
         </p:txBody>
@@ -10000,7 +8795,7 @@
           <p:nvPr/>
         </p:nvGraphicFramePr>
         <p:xfrm>
-          <a:off x="566928" y="3547872"/>
+          <a:off x="566928" y="3328416"/>
           <a:ext cx="11057835" cy="1097280"/>
         </p:xfrm>
         <a:graphic>
@@ -10757,7 +9552,7 @@
         </p:nvSpPr>
         <p:spPr>
           <a:xfrm>
-            <a:off x="566928" y="4754880"/>
+            <a:off x="566928" y="4535424"/>
             <a:ext cx="5391759" cy="822960"/>
           </a:xfrm>
           <a:prstGeom prst="rect">
@@ -10803,7 +9598,7 @@
         </p:nvSpPr>
         <p:spPr>
           <a:xfrm>
-            <a:off x="713232" y="4864608"/>
+            <a:off x="713232" y="4645152"/>
             <a:ext cx="5117439" cy="640080"/>
           </a:xfrm>
           <a:prstGeom prst="rect">
@@ -10892,7 +9687,7 @@
         </p:nvSpPr>
         <p:spPr>
           <a:xfrm>
-            <a:off x="6233007" y="4754880"/>
+            <a:off x="6233007" y="4535424"/>
             <a:ext cx="5391759" cy="822960"/>
           </a:xfrm>
           <a:prstGeom prst="rect">
@@ -10938,7 +9733,7 @@
         </p:nvSpPr>
         <p:spPr>
           <a:xfrm>
-            <a:off x="6379311" y="4864608"/>
+            <a:off x="6379311" y="4645152"/>
             <a:ext cx="5117439" cy="640080"/>
           </a:xfrm>
           <a:prstGeom prst="rect">
@@ -11027,7 +9822,7 @@
         </p:nvSpPr>
         <p:spPr>
           <a:xfrm>
-            <a:off x="566928" y="5705856"/>
+            <a:off x="566928" y="5486400"/>
             <a:ext cx="11057839" cy="566928"/>
           </a:xfrm>
           <a:prstGeom prst="rect">
@@ -11071,7 +9866,7 @@
         </p:nvSpPr>
         <p:spPr>
           <a:xfrm>
-            <a:off x="566928" y="5705856"/>
+            <a:off x="566928" y="5486400"/>
             <a:ext cx="38100" cy="566928"/>
           </a:xfrm>
           <a:prstGeom prst="rect">
@@ -11115,7 +9910,7 @@
         </p:nvSpPr>
         <p:spPr>
           <a:xfrm>
-            <a:off x="713232" y="5815584"/>
+            <a:off x="713232" y="5596128"/>
             <a:ext cx="10783519" cy="384048"/>
           </a:xfrm>
           <a:prstGeom prst="rect">
@@ -11369,8 +10164,383 @@
         </p:nvSpPr>
         <p:spPr>
           <a:xfrm>
-            <a:off x="566928" y="1810512"/>
-            <a:ext cx="1371600" cy="548640"/>
+            <a:off x="566928" y="1600200"/>
+            <a:ext cx="1975104" cy="658368"/>
+          </a:xfrm>
+          <a:prstGeom prst="rect">
+            <a:avLst/>
+          </a:prstGeom>
+          <a:solidFill>
+            <a:srgbClr val="F4F6F8"/>
+          </a:solidFill>
+          <a:ln w="9525">
+            <a:solidFill>
+              <a:srgbClr val="D5DBE2"/>
+            </a:solidFill>
+          </a:ln>
+          <a:effectLst/>
+        </p:spPr>
+        <p:style>
+          <a:lnRef idx="1">
+            <a:schemeClr val="accent1"/>
+          </a:lnRef>
+          <a:fillRef idx="3">
+            <a:schemeClr val="accent1"/>
+          </a:fillRef>
+          <a:effectRef idx="2">
+            <a:schemeClr val="accent1"/>
+          </a:effectRef>
+          <a:fontRef idx="minor">
+            <a:schemeClr val="lt1"/>
+          </a:fontRef>
+        </p:style>
+        <p:txBody>
+          <a:bodyPr rtlCol="0" anchor="ctr" wrap="square" rIns="54864" tIns="0" bIns="0"/>
+          <a:lstStyle/>
+          <a:p>
+            <a:pPr algn="ctr">
+              <a:spcBef>
+                <a:spcPts val="0"/>
+              </a:spcBef>
+              <a:spcAft>
+                <a:spcPts val="0"/>
+              </a:spcAft>
+            </a:pPr>
+            <a:r>
+              <a:rPr sz="1200" b="1">
+                <a:solidFill>
+                  <a:srgbClr val="131A24"/>
+                </a:solidFill>
+                <a:latin typeface="Calibri"/>
+              </a:rPr>
+              <a:t>New filings</a:t>
+            </a:r>
+          </a:p>
+          <a:p>
+            <a:pPr algn="ctr">
+              <a:spcBef>
+                <a:spcPts val="0"/>
+              </a:spcBef>
+              <a:spcAft>
+                <a:spcPts val="0"/>
+              </a:spcAft>
+            </a:pPr>
+            <a:r>
+              <a:rPr sz="900" b="0">
+                <a:solidFill>
+                  <a:srgbClr val="61707F"/>
+                </a:solidFill>
+                <a:latin typeface="Consolas"/>
+              </a:rPr>
+              <a:t>every week</a:t>
+            </a:r>
+          </a:p>
+        </p:txBody>
+      </p:sp>
+      <p:sp>
+        <p:nvSpPr>
+          <p:cNvPr id="7" name="Right Arrow 6"/>
+          <p:cNvSpPr/>
+          <p:nvPr/>
+        </p:nvSpPr>
+        <p:spPr>
+          <a:xfrm>
+            <a:off x="2578608" y="1865376"/>
+            <a:ext cx="237744" cy="128016"/>
+          </a:xfrm>
+          <a:prstGeom prst="rightArrow">
+            <a:avLst/>
+          </a:prstGeom>
+          <a:solidFill>
+            <a:srgbClr val="1C4FD8"/>
+          </a:solidFill>
+          <a:ln>
+            <a:noFill/>
+          </a:ln>
+          <a:effectLst/>
+        </p:spPr>
+        <p:style>
+          <a:lnRef idx="1">
+            <a:schemeClr val="accent1"/>
+          </a:lnRef>
+          <a:fillRef idx="3">
+            <a:schemeClr val="accent1"/>
+          </a:fillRef>
+          <a:effectRef idx="2">
+            <a:schemeClr val="accent1"/>
+          </a:effectRef>
+          <a:fontRef idx="minor">
+            <a:schemeClr val="lt1"/>
+          </a:fontRef>
+        </p:style>
+        <p:txBody>
+          <a:bodyPr rtlCol="0" anchor="ctr"/>
+          <a:lstStyle/>
+          <a:p>
+            <a:pPr algn="ctr"/>
+          </a:p>
+        </p:txBody>
+      </p:sp>
+      <p:sp>
+        <p:nvSpPr>
+          <p:cNvPr id="8" name="Rectangle 7"/>
+          <p:cNvSpPr/>
+          <p:nvPr/>
+        </p:nvSpPr>
+        <p:spPr>
+          <a:xfrm>
+            <a:off x="2852928" y="1600200"/>
+            <a:ext cx="1975104" cy="658368"/>
+          </a:xfrm>
+          <a:prstGeom prst="rect">
+            <a:avLst/>
+          </a:prstGeom>
+          <a:solidFill>
+            <a:srgbClr val="F4F6F8"/>
+          </a:solidFill>
+          <a:ln w="9525">
+            <a:solidFill>
+              <a:srgbClr val="D5DBE2"/>
+            </a:solidFill>
+          </a:ln>
+          <a:effectLst/>
+        </p:spPr>
+        <p:style>
+          <a:lnRef idx="1">
+            <a:schemeClr val="accent1"/>
+          </a:lnRef>
+          <a:fillRef idx="3">
+            <a:schemeClr val="accent1"/>
+          </a:fillRef>
+          <a:effectRef idx="2">
+            <a:schemeClr val="accent1"/>
+          </a:effectRef>
+          <a:fontRef idx="minor">
+            <a:schemeClr val="lt1"/>
+          </a:fontRef>
+        </p:style>
+        <p:txBody>
+          <a:bodyPr rtlCol="0" anchor="ctr" wrap="square" rIns="54864" tIns="0" bIns="0"/>
+          <a:lstStyle/>
+          <a:p>
+            <a:pPr algn="ctr">
+              <a:spcBef>
+                <a:spcPts val="0"/>
+              </a:spcBef>
+              <a:spcAft>
+                <a:spcPts val="0"/>
+              </a:spcAft>
+            </a:pPr>
+            <a:r>
+              <a:rPr sz="1200" b="1">
+                <a:solidFill>
+                  <a:srgbClr val="131A24"/>
+                </a:solidFill>
+                <a:latin typeface="Calibri"/>
+              </a:rPr>
+              <a:t>Keep the raw files</a:t>
+            </a:r>
+          </a:p>
+          <a:p>
+            <a:pPr algn="ctr">
+              <a:spcBef>
+                <a:spcPts val="0"/>
+              </a:spcBef>
+              <a:spcAft>
+                <a:spcPts val="0"/>
+              </a:spcAft>
+            </a:pPr>
+            <a:r>
+              <a:rPr sz="900" b="0">
+                <a:solidFill>
+                  <a:srgbClr val="61707F"/>
+                </a:solidFill>
+                <a:latin typeface="Consolas"/>
+              </a:rPr>
+              <a:t>never re-fetch</a:t>
+            </a:r>
+          </a:p>
+        </p:txBody>
+      </p:sp>
+      <p:sp>
+        <p:nvSpPr>
+          <p:cNvPr id="9" name="Right Arrow 8"/>
+          <p:cNvSpPr/>
+          <p:nvPr/>
+        </p:nvSpPr>
+        <p:spPr>
+          <a:xfrm>
+            <a:off x="4864608" y="1865376"/>
+            <a:ext cx="237744" cy="128016"/>
+          </a:xfrm>
+          <a:prstGeom prst="rightArrow">
+            <a:avLst/>
+          </a:prstGeom>
+          <a:solidFill>
+            <a:srgbClr val="1C4FD8"/>
+          </a:solidFill>
+          <a:ln>
+            <a:noFill/>
+          </a:ln>
+          <a:effectLst/>
+        </p:spPr>
+        <p:style>
+          <a:lnRef idx="1">
+            <a:schemeClr val="accent1"/>
+          </a:lnRef>
+          <a:fillRef idx="3">
+            <a:schemeClr val="accent1"/>
+          </a:fillRef>
+          <a:effectRef idx="2">
+            <a:schemeClr val="accent1"/>
+          </a:effectRef>
+          <a:fontRef idx="minor">
+            <a:schemeClr val="lt1"/>
+          </a:fontRef>
+        </p:style>
+        <p:txBody>
+          <a:bodyPr rtlCol="0" anchor="ctr"/>
+          <a:lstStyle/>
+          <a:p>
+            <a:pPr algn="ctr"/>
+          </a:p>
+        </p:txBody>
+      </p:sp>
+      <p:sp>
+        <p:nvSpPr>
+          <p:cNvPr id="10" name="Rectangle 9"/>
+          <p:cNvSpPr/>
+          <p:nvPr/>
+        </p:nvSpPr>
+        <p:spPr>
+          <a:xfrm>
+            <a:off x="5138928" y="1600200"/>
+            <a:ext cx="1975104" cy="658368"/>
+          </a:xfrm>
+          <a:prstGeom prst="rect">
+            <a:avLst/>
+          </a:prstGeom>
+          <a:solidFill>
+            <a:srgbClr val="E6ECFD"/>
+          </a:solidFill>
+          <a:ln w="9525">
+            <a:solidFill>
+              <a:srgbClr val="1C4FD8"/>
+            </a:solidFill>
+          </a:ln>
+          <a:effectLst/>
+        </p:spPr>
+        <p:style>
+          <a:lnRef idx="1">
+            <a:schemeClr val="accent1"/>
+          </a:lnRef>
+          <a:fillRef idx="3">
+            <a:schemeClr val="accent1"/>
+          </a:fillRef>
+          <a:effectRef idx="2">
+            <a:schemeClr val="accent1"/>
+          </a:effectRef>
+          <a:fontRef idx="minor">
+            <a:schemeClr val="lt1"/>
+          </a:fontRef>
+        </p:style>
+        <p:txBody>
+          <a:bodyPr rtlCol="0" anchor="ctr" wrap="square" rIns="54864" tIns="0" bIns="0"/>
+          <a:lstStyle/>
+          <a:p>
+            <a:pPr algn="ctr">
+              <a:spcBef>
+                <a:spcPts val="0"/>
+              </a:spcBef>
+              <a:spcAft>
+                <a:spcPts val="0"/>
+              </a:spcAft>
+            </a:pPr>
+            <a:r>
+              <a:rPr sz="1200" b="1">
+                <a:solidFill>
+                  <a:srgbClr val="131A24"/>
+                </a:solidFill>
+                <a:latin typeface="Calibri"/>
+              </a:rPr>
+              <a:t>One job per patent</a:t>
+            </a:r>
+          </a:p>
+          <a:p>
+            <a:pPr algn="ctr">
+              <a:spcBef>
+                <a:spcPts val="0"/>
+              </a:spcBef>
+              <a:spcAft>
+                <a:spcPts val="0"/>
+              </a:spcAft>
+            </a:pPr>
+            <a:r>
+              <a:rPr sz="900" b="0">
+                <a:solidFill>
+                  <a:srgbClr val="61707F"/>
+                </a:solidFill>
+                <a:latin typeface="Consolas"/>
+              </a:rPr>
+              <a:t>a work queue</a:t>
+            </a:r>
+          </a:p>
+        </p:txBody>
+      </p:sp>
+      <p:sp>
+        <p:nvSpPr>
+          <p:cNvPr id="11" name="Right Arrow 10"/>
+          <p:cNvSpPr/>
+          <p:nvPr/>
+        </p:nvSpPr>
+        <p:spPr>
+          <a:xfrm>
+            <a:off x="7150608" y="1865376"/>
+            <a:ext cx="237744" cy="128016"/>
+          </a:xfrm>
+          <a:prstGeom prst="rightArrow">
+            <a:avLst/>
+          </a:prstGeom>
+          <a:solidFill>
+            <a:srgbClr val="1C4FD8"/>
+          </a:solidFill>
+          <a:ln>
+            <a:noFill/>
+          </a:ln>
+          <a:effectLst/>
+        </p:spPr>
+        <p:style>
+          <a:lnRef idx="1">
+            <a:schemeClr val="accent1"/>
+          </a:lnRef>
+          <a:fillRef idx="3">
+            <a:schemeClr val="accent1"/>
+          </a:fillRef>
+          <a:effectRef idx="2">
+            <a:schemeClr val="accent1"/>
+          </a:effectRef>
+          <a:fontRef idx="minor">
+            <a:schemeClr val="lt1"/>
+          </a:fontRef>
+        </p:style>
+        <p:txBody>
+          <a:bodyPr rtlCol="0" anchor="ctr"/>
+          <a:lstStyle/>
+          <a:p>
+            <a:pPr algn="ctr"/>
+          </a:p>
+        </p:txBody>
+      </p:sp>
+      <p:sp>
+        <p:nvSpPr>
+          <p:cNvPr id="12" name="Rectangle 11"/>
+          <p:cNvSpPr/>
+          <p:nvPr/>
+        </p:nvSpPr>
+        <p:spPr>
+          <a:xfrm>
+            <a:off x="7424928" y="1600200"/>
+            <a:ext cx="1975104" cy="658368"/>
           </a:xfrm>
           <a:prstGeom prst="rect">
             <a:avLst/>
@@ -11418,7 +10588,7 @@
                 </a:solidFill>
                 <a:latin typeface="Calibri"/>
               </a:rPr>
-              <a:t>USPTO</a:t>
+              <a:t>Workers process it</a:t>
             </a:r>
           </a:p>
           <a:p>
@@ -11437,21 +10607,21 @@
                 </a:solidFill>
                 <a:latin typeface="Consolas"/>
               </a:rPr>
-              <a:t>weekly bulk</a:t>
-            </a:r>
-          </a:p>
-        </p:txBody>
-      </p:sp>
-      <p:sp>
-        <p:nvSpPr>
-          <p:cNvPr id="7" name="Right Arrow 6"/>
+              <a:t>parse, embed, index</a:t>
+            </a:r>
+          </a:p>
+        </p:txBody>
+      </p:sp>
+      <p:sp>
+        <p:nvSpPr>
+          <p:cNvPr id="13" name="Right Arrow 12"/>
           <p:cNvSpPr/>
           <p:nvPr/>
         </p:nvSpPr>
         <p:spPr>
           <a:xfrm>
-            <a:off x="2011680" y="2029968"/>
-            <a:ext cx="274320" cy="128016"/>
+            <a:off x="9436608" y="1865376"/>
+            <a:ext cx="237744" cy="128016"/>
           </a:xfrm>
           <a:prstGeom prst="rightArrow">
             <a:avLst/>
@@ -11488,24 +10658,24 @@
       </p:sp>
       <p:sp>
         <p:nvSpPr>
-          <p:cNvPr id="8" name="Rectangle 7"/>
+          <p:cNvPr id="14" name="Rectangle 13"/>
           <p:cNvSpPr/>
           <p:nvPr/>
         </p:nvSpPr>
         <p:spPr>
           <a:xfrm>
-            <a:off x="2359152" y="1810512"/>
-            <a:ext cx="1280160" cy="548640"/>
+            <a:off x="9710928" y="1600200"/>
+            <a:ext cx="1975104" cy="658368"/>
           </a:xfrm>
           <a:prstGeom prst="rect">
             <a:avLst/>
           </a:prstGeom>
           <a:solidFill>
-            <a:srgbClr val="F4F6F8"/>
+            <a:srgbClr val="E3F2E9"/>
           </a:solidFill>
           <a:ln w="9525">
             <a:solidFill>
-              <a:srgbClr val="D5DBE2"/>
+              <a:srgbClr val="15683C"/>
             </a:solidFill>
           </a:ln>
           <a:effectLst/>
@@ -11543,7 +10713,7 @@
                 </a:solidFill>
                 <a:latin typeface="Calibri"/>
               </a:rPr>
-              <a:t>S3</a:t>
+              <a:t>Search index</a:t>
             </a:r>
           </a:p>
           <a:p>
@@ -11562,702 +10732,21 @@
                 </a:solidFill>
                 <a:latin typeface="Consolas"/>
               </a:rPr>
-              <a:t>immutable</a:t>
-            </a:r>
-          </a:p>
-        </p:txBody>
-      </p:sp>
-      <p:sp>
-        <p:nvSpPr>
-          <p:cNvPr id="9" name="Right Arrow 8"/>
+              <a:t>ready to query</a:t>
+            </a:r>
+          </a:p>
+        </p:txBody>
+      </p:sp>
+      <p:sp>
+        <p:nvSpPr>
+          <p:cNvPr id="15" name="Down Arrow 14"/>
           <p:cNvSpPr/>
           <p:nvPr/>
         </p:nvSpPr>
         <p:spPr>
           <a:xfrm>
-            <a:off x="3712464" y="2029968"/>
-            <a:ext cx="274320" cy="128016"/>
-          </a:xfrm>
-          <a:prstGeom prst="rightArrow">
-            <a:avLst/>
-          </a:prstGeom>
-          <a:solidFill>
-            <a:srgbClr val="1C4FD8"/>
-          </a:solidFill>
-          <a:ln>
-            <a:noFill/>
-          </a:ln>
-          <a:effectLst/>
-        </p:spPr>
-        <p:style>
-          <a:lnRef idx="1">
-            <a:schemeClr val="accent1"/>
-          </a:lnRef>
-          <a:fillRef idx="3">
-            <a:schemeClr val="accent1"/>
-          </a:fillRef>
-          <a:effectRef idx="2">
-            <a:schemeClr val="accent1"/>
-          </a:effectRef>
-          <a:fontRef idx="minor">
-            <a:schemeClr val="lt1"/>
-          </a:fontRef>
-        </p:style>
-        <p:txBody>
-          <a:bodyPr rtlCol="0" anchor="ctr"/>
-          <a:lstStyle/>
-          <a:p>
-            <a:pPr algn="ctr"/>
-          </a:p>
-        </p:txBody>
-      </p:sp>
-      <p:sp>
-        <p:nvSpPr>
-          <p:cNvPr id="10" name="Rectangle 9"/>
-          <p:cNvSpPr/>
-          <p:nvPr/>
-        </p:nvSpPr>
-        <p:spPr>
-          <a:xfrm>
-            <a:off x="4059936" y="1810512"/>
-            <a:ext cx="1371600" cy="548640"/>
-          </a:xfrm>
-          <a:prstGeom prst="rect">
-            <a:avLst/>
-          </a:prstGeom>
-          <a:solidFill>
-            <a:srgbClr val="FFFFFF"/>
-          </a:solidFill>
-          <a:ln w="9525">
-            <a:solidFill>
-              <a:srgbClr val="D5DBE2"/>
-            </a:solidFill>
-          </a:ln>
-          <a:effectLst/>
-        </p:spPr>
-        <p:style>
-          <a:lnRef idx="1">
-            <a:schemeClr val="accent1"/>
-          </a:lnRef>
-          <a:fillRef idx="3">
-            <a:schemeClr val="accent1"/>
-          </a:fillRef>
-          <a:effectRef idx="2">
-            <a:schemeClr val="accent1"/>
-          </a:effectRef>
-          <a:fontRef idx="minor">
-            <a:schemeClr val="lt1"/>
-          </a:fontRef>
-        </p:style>
-        <p:txBody>
-          <a:bodyPr rtlCol="0" anchor="ctr" wrap="square" rIns="54864" tIns="0" bIns="0"/>
-          <a:lstStyle/>
-          <a:p>
-            <a:pPr algn="ctr">
-              <a:spcBef>
-                <a:spcPts val="0"/>
-              </a:spcBef>
-              <a:spcAft>
-                <a:spcPts val="0"/>
-              </a:spcAft>
-            </a:pPr>
-            <a:r>
-              <a:rPr sz="1200" b="1">
-                <a:solidFill>
-                  <a:srgbClr val="131A24"/>
-                </a:solidFill>
-                <a:latin typeface="Calibri"/>
-              </a:rPr>
-              <a:t>Queue</a:t>
-            </a:r>
-          </a:p>
-          <a:p>
-            <a:pPr algn="ctr">
-              <a:spcBef>
-                <a:spcPts val="0"/>
-              </a:spcBef>
-              <a:spcAft>
-                <a:spcPts val="0"/>
-              </a:spcAft>
-            </a:pPr>
-            <a:r>
-              <a:rPr sz="900" b="0">
-                <a:solidFill>
-                  <a:srgbClr val="61707F"/>
-                </a:solidFill>
-                <a:latin typeface="Consolas"/>
-              </a:rPr>
-              <a:t>1 msg/patent</a:t>
-            </a:r>
-          </a:p>
-        </p:txBody>
-      </p:sp>
-      <p:sp>
-        <p:nvSpPr>
-          <p:cNvPr id="11" name="Rectangle 10"/>
-          <p:cNvSpPr/>
-          <p:nvPr/>
-        </p:nvSpPr>
-        <p:spPr>
-          <a:xfrm>
-            <a:off x="4059936" y="1810512"/>
-            <a:ext cx="50292" cy="548640"/>
-          </a:xfrm>
-          <a:prstGeom prst="rect">
-            <a:avLst/>
-          </a:prstGeom>
-          <a:solidFill>
-            <a:srgbClr val="1C4FD8"/>
-          </a:solidFill>
-          <a:ln>
-            <a:noFill/>
-          </a:ln>
-          <a:effectLst/>
-        </p:spPr>
-        <p:style>
-          <a:lnRef idx="1">
-            <a:schemeClr val="accent1"/>
-          </a:lnRef>
-          <a:fillRef idx="3">
-            <a:schemeClr val="accent1"/>
-          </a:fillRef>
-          <a:effectRef idx="2">
-            <a:schemeClr val="accent1"/>
-          </a:effectRef>
-          <a:fontRef idx="minor">
-            <a:schemeClr val="lt1"/>
-          </a:fontRef>
-        </p:style>
-        <p:txBody>
-          <a:bodyPr rtlCol="0" anchor="ctr" wrap="square"/>
-          <a:lstStyle/>
-          <a:p>
-            <a:pPr algn="ctr"/>
-          </a:p>
-        </p:txBody>
-      </p:sp>
-      <p:sp>
-        <p:nvSpPr>
-          <p:cNvPr id="12" name="Rectangle 11"/>
-          <p:cNvSpPr/>
-          <p:nvPr/>
-        </p:nvSpPr>
-        <p:spPr>
-          <a:xfrm>
-            <a:off x="5705856" y="1554480"/>
-            <a:ext cx="1188720" cy="402336"/>
-          </a:xfrm>
-          <a:prstGeom prst="rect">
-            <a:avLst/>
-          </a:prstGeom>
-          <a:solidFill>
-            <a:srgbClr val="FFFFFF"/>
-          </a:solidFill>
-          <a:ln w="9525">
-            <a:solidFill>
-              <a:srgbClr val="D5DBE2"/>
-            </a:solidFill>
-          </a:ln>
-          <a:effectLst/>
-        </p:spPr>
-        <p:style>
-          <a:lnRef idx="1">
-            <a:schemeClr val="accent1"/>
-          </a:lnRef>
-          <a:fillRef idx="3">
-            <a:schemeClr val="accent1"/>
-          </a:fillRef>
-          <a:effectRef idx="2">
-            <a:schemeClr val="accent1"/>
-          </a:effectRef>
-          <a:fontRef idx="minor">
-            <a:schemeClr val="lt1"/>
-          </a:fontRef>
-        </p:style>
-        <p:txBody>
-          <a:bodyPr rtlCol="0" anchor="ctr" wrap="square" rIns="54864" tIns="0" bIns="0"/>
-          <a:lstStyle/>
-          <a:p>
-            <a:pPr algn="ctr">
-              <a:spcBef>
-                <a:spcPts val="0"/>
-              </a:spcBef>
-              <a:spcAft>
-                <a:spcPts val="0"/>
-              </a:spcAft>
-            </a:pPr>
-            <a:r>
-              <a:rPr sz="1000" b="1">
-                <a:solidFill>
-                  <a:srgbClr val="131A24"/>
-                </a:solidFill>
-                <a:latin typeface="Calibri"/>
-              </a:rPr>
-              <a:t>Parser</a:t>
-            </a:r>
-          </a:p>
-        </p:txBody>
-      </p:sp>
-      <p:sp>
-        <p:nvSpPr>
-          <p:cNvPr id="13" name="Rectangle 12"/>
-          <p:cNvSpPr/>
-          <p:nvPr/>
-        </p:nvSpPr>
-        <p:spPr>
-          <a:xfrm>
-            <a:off x="7004304" y="1554480"/>
-            <a:ext cx="1188720" cy="402336"/>
-          </a:xfrm>
-          <a:prstGeom prst="rect">
-            <a:avLst/>
-          </a:prstGeom>
-          <a:solidFill>
-            <a:srgbClr val="FFFFFF"/>
-          </a:solidFill>
-          <a:ln w="9525">
-            <a:solidFill>
-              <a:srgbClr val="D5DBE2"/>
-            </a:solidFill>
-          </a:ln>
-          <a:effectLst/>
-        </p:spPr>
-        <p:style>
-          <a:lnRef idx="1">
-            <a:schemeClr val="accent1"/>
-          </a:lnRef>
-          <a:fillRef idx="3">
-            <a:schemeClr val="accent1"/>
-          </a:fillRef>
-          <a:effectRef idx="2">
-            <a:schemeClr val="accent1"/>
-          </a:effectRef>
-          <a:fontRef idx="minor">
-            <a:schemeClr val="lt1"/>
-          </a:fontRef>
-        </p:style>
-        <p:txBody>
-          <a:bodyPr rtlCol="0" anchor="ctr" wrap="square" rIns="54864" tIns="0" bIns="0"/>
-          <a:lstStyle/>
-          <a:p>
-            <a:pPr algn="ctr">
-              <a:spcBef>
-                <a:spcPts val="0"/>
-              </a:spcBef>
-              <a:spcAft>
-                <a:spcPts val="0"/>
-              </a:spcAft>
-            </a:pPr>
-            <a:r>
-              <a:rPr sz="1000" b="1">
-                <a:solidFill>
-                  <a:srgbClr val="131A24"/>
-                </a:solidFill>
-                <a:latin typeface="Calibri"/>
-              </a:rPr>
-              <a:t>Reconstruct</a:t>
-            </a:r>
-          </a:p>
-        </p:txBody>
-      </p:sp>
-      <p:sp>
-        <p:nvSpPr>
-          <p:cNvPr id="14" name="Rectangle 13"/>
-          <p:cNvSpPr/>
-          <p:nvPr/>
-        </p:nvSpPr>
-        <p:spPr>
-          <a:xfrm>
-            <a:off x="8302752" y="1554480"/>
-            <a:ext cx="1188720" cy="402336"/>
-          </a:xfrm>
-          <a:prstGeom prst="rect">
-            <a:avLst/>
-          </a:prstGeom>
-          <a:solidFill>
-            <a:srgbClr val="FFFFFF"/>
-          </a:solidFill>
-          <a:ln w="9525">
-            <a:solidFill>
-              <a:srgbClr val="D5DBE2"/>
-            </a:solidFill>
-          </a:ln>
-          <a:effectLst/>
-        </p:spPr>
-        <p:style>
-          <a:lnRef idx="1">
-            <a:schemeClr val="accent1"/>
-          </a:lnRef>
-          <a:fillRef idx="3">
-            <a:schemeClr val="accent1"/>
-          </a:fillRef>
-          <a:effectRef idx="2">
-            <a:schemeClr val="accent1"/>
-          </a:effectRef>
-          <a:fontRef idx="minor">
-            <a:schemeClr val="lt1"/>
-          </a:fontRef>
-        </p:style>
-        <p:txBody>
-          <a:bodyPr rtlCol="0" anchor="ctr" wrap="square" rIns="54864" tIns="0" bIns="0"/>
-          <a:lstStyle/>
-          <a:p>
-            <a:pPr algn="ctr">
-              <a:spcBef>
-                <a:spcPts val="0"/>
-              </a:spcBef>
-              <a:spcAft>
-                <a:spcPts val="0"/>
-              </a:spcAft>
-            </a:pPr>
-            <a:r>
-              <a:rPr sz="1000" b="1">
-                <a:solidFill>
-                  <a:srgbClr val="131A24"/>
-                </a:solidFill>
-                <a:latin typeface="Calibri"/>
-              </a:rPr>
-              <a:t>Embed (GPU)</a:t>
-            </a:r>
-          </a:p>
-        </p:txBody>
-      </p:sp>
-      <p:sp>
-        <p:nvSpPr>
-          <p:cNvPr id="15" name="Rectangle 14"/>
-          <p:cNvSpPr/>
-          <p:nvPr/>
-        </p:nvSpPr>
-        <p:spPr>
-          <a:xfrm>
-            <a:off x="9601200" y="1554480"/>
-            <a:ext cx="1188720" cy="402336"/>
-          </a:xfrm>
-          <a:prstGeom prst="rect">
-            <a:avLst/>
-          </a:prstGeom>
-          <a:solidFill>
-            <a:srgbClr val="FFFFFF"/>
-          </a:solidFill>
-          <a:ln w="9525">
-            <a:solidFill>
-              <a:srgbClr val="D5DBE2"/>
-            </a:solidFill>
-          </a:ln>
-          <a:effectLst/>
-        </p:spPr>
-        <p:style>
-          <a:lnRef idx="1">
-            <a:schemeClr val="accent1"/>
-          </a:lnRef>
-          <a:fillRef idx="3">
-            <a:schemeClr val="accent1"/>
-          </a:fillRef>
-          <a:effectRef idx="2">
-            <a:schemeClr val="accent1"/>
-          </a:effectRef>
-          <a:fontRef idx="minor">
-            <a:schemeClr val="lt1"/>
-          </a:fontRef>
-        </p:style>
-        <p:txBody>
-          <a:bodyPr rtlCol="0" anchor="ctr" wrap="square" rIns="54864" tIns="0" bIns="0"/>
-          <a:lstStyle/>
-          <a:p>
-            <a:pPr algn="ctr">
-              <a:spcBef>
-                <a:spcPts val="0"/>
-              </a:spcBef>
-              <a:spcAft>
-                <a:spcPts val="0"/>
-              </a:spcAft>
-            </a:pPr>
-            <a:r>
-              <a:rPr sz="1000" b="1">
-                <a:solidFill>
-                  <a:srgbClr val="131A24"/>
-                </a:solidFill>
-                <a:latin typeface="Calibri"/>
-              </a:rPr>
-              <a:t>Index</a:t>
-            </a:r>
-          </a:p>
-        </p:txBody>
-      </p:sp>
-      <p:sp>
-        <p:nvSpPr>
-          <p:cNvPr id="16" name="Right Arrow 15"/>
-          <p:cNvSpPr/>
-          <p:nvPr/>
-        </p:nvSpPr>
-        <p:spPr>
-          <a:xfrm>
-            <a:off x="5468112" y="1737360"/>
-            <a:ext cx="201168" cy="128016"/>
-          </a:xfrm>
-          <a:prstGeom prst="rightArrow">
-            <a:avLst/>
-          </a:prstGeom>
-          <a:solidFill>
-            <a:srgbClr val="1C4FD8"/>
-          </a:solidFill>
-          <a:ln>
-            <a:noFill/>
-          </a:ln>
-          <a:effectLst/>
-        </p:spPr>
-        <p:style>
-          <a:lnRef idx="1">
-            <a:schemeClr val="accent1"/>
-          </a:lnRef>
-          <a:fillRef idx="3">
-            <a:schemeClr val="accent1"/>
-          </a:fillRef>
-          <a:effectRef idx="2">
-            <a:schemeClr val="accent1"/>
-          </a:effectRef>
-          <a:fontRef idx="minor">
-            <a:schemeClr val="lt1"/>
-          </a:fontRef>
-        </p:style>
-        <p:txBody>
-          <a:bodyPr rtlCol="0" anchor="ctr"/>
-          <a:lstStyle/>
-          <a:p>
-            <a:pPr algn="ctr"/>
-          </a:p>
-        </p:txBody>
-      </p:sp>
-      <p:sp>
-        <p:nvSpPr>
-          <p:cNvPr id="17" name="Rectangle 16"/>
-          <p:cNvSpPr/>
-          <p:nvPr/>
-        </p:nvSpPr>
-        <p:spPr>
-          <a:xfrm>
-            <a:off x="6254496" y="2029968"/>
-            <a:ext cx="4206240" cy="15875"/>
-          </a:xfrm>
-          <a:prstGeom prst="rect">
-            <a:avLst/>
-          </a:prstGeom>
-          <a:solidFill>
-            <a:srgbClr val="1C4FD8"/>
-          </a:solidFill>
-          <a:ln>
-            <a:noFill/>
-          </a:ln>
-          <a:effectLst/>
-        </p:spPr>
-        <p:style>
-          <a:lnRef idx="1">
-            <a:schemeClr val="accent1"/>
-          </a:lnRef>
-          <a:fillRef idx="3">
-            <a:schemeClr val="accent1"/>
-          </a:fillRef>
-          <a:effectRef idx="2">
-            <a:schemeClr val="accent1"/>
-          </a:effectRef>
-          <a:fontRef idx="minor">
-            <a:schemeClr val="lt1"/>
-          </a:fontRef>
-        </p:style>
-        <p:txBody>
-          <a:bodyPr rtlCol="0" anchor="ctr" wrap="square"/>
-          <a:lstStyle/>
-          <a:p>
-            <a:pPr algn="ctr"/>
-          </a:p>
-        </p:txBody>
-      </p:sp>
-      <p:sp>
-        <p:nvSpPr>
-          <p:cNvPr id="18" name="Rectangle 17"/>
-          <p:cNvSpPr/>
-          <p:nvPr/>
-        </p:nvSpPr>
-        <p:spPr>
-          <a:xfrm>
-            <a:off x="6300216" y="1956816"/>
-            <a:ext cx="15875" cy="73152"/>
-          </a:xfrm>
-          <a:prstGeom prst="rect">
-            <a:avLst/>
-          </a:prstGeom>
-          <a:solidFill>
-            <a:srgbClr val="1C4FD8"/>
-          </a:solidFill>
-          <a:ln>
-            <a:noFill/>
-          </a:ln>
-          <a:effectLst/>
-        </p:spPr>
-        <p:style>
-          <a:lnRef idx="1">
-            <a:schemeClr val="accent1"/>
-          </a:lnRef>
-          <a:fillRef idx="3">
-            <a:schemeClr val="accent1"/>
-          </a:fillRef>
-          <a:effectRef idx="2">
-            <a:schemeClr val="accent1"/>
-          </a:effectRef>
-          <a:fontRef idx="minor">
-            <a:schemeClr val="lt1"/>
-          </a:fontRef>
-        </p:style>
-        <p:txBody>
-          <a:bodyPr rtlCol="0" anchor="ctr" wrap="square"/>
-          <a:lstStyle/>
-          <a:p>
-            <a:pPr algn="ctr"/>
-          </a:p>
-        </p:txBody>
-      </p:sp>
-      <p:sp>
-        <p:nvSpPr>
-          <p:cNvPr id="19" name="Rectangle 18"/>
-          <p:cNvSpPr/>
-          <p:nvPr/>
-        </p:nvSpPr>
-        <p:spPr>
-          <a:xfrm>
-            <a:off x="7598664" y="1956816"/>
-            <a:ext cx="15875" cy="73152"/>
-          </a:xfrm>
-          <a:prstGeom prst="rect">
-            <a:avLst/>
-          </a:prstGeom>
-          <a:solidFill>
-            <a:srgbClr val="1C4FD8"/>
-          </a:solidFill>
-          <a:ln>
-            <a:noFill/>
-          </a:ln>
-          <a:effectLst/>
-        </p:spPr>
-        <p:style>
-          <a:lnRef idx="1">
-            <a:schemeClr val="accent1"/>
-          </a:lnRef>
-          <a:fillRef idx="3">
-            <a:schemeClr val="accent1"/>
-          </a:fillRef>
-          <a:effectRef idx="2">
-            <a:schemeClr val="accent1"/>
-          </a:effectRef>
-          <a:fontRef idx="minor">
-            <a:schemeClr val="lt1"/>
-          </a:fontRef>
-        </p:style>
-        <p:txBody>
-          <a:bodyPr rtlCol="0" anchor="ctr" wrap="square"/>
-          <a:lstStyle/>
-          <a:p>
-            <a:pPr algn="ctr"/>
-          </a:p>
-        </p:txBody>
-      </p:sp>
-      <p:sp>
-        <p:nvSpPr>
-          <p:cNvPr id="20" name="Rectangle 19"/>
-          <p:cNvSpPr/>
-          <p:nvPr/>
-        </p:nvSpPr>
-        <p:spPr>
-          <a:xfrm>
-            <a:off x="8897112" y="1956816"/>
-            <a:ext cx="15875" cy="73152"/>
-          </a:xfrm>
-          <a:prstGeom prst="rect">
-            <a:avLst/>
-          </a:prstGeom>
-          <a:solidFill>
-            <a:srgbClr val="1C4FD8"/>
-          </a:solidFill>
-          <a:ln>
-            <a:noFill/>
-          </a:ln>
-          <a:effectLst/>
-        </p:spPr>
-        <p:style>
-          <a:lnRef idx="1">
-            <a:schemeClr val="accent1"/>
-          </a:lnRef>
-          <a:fillRef idx="3">
-            <a:schemeClr val="accent1"/>
-          </a:fillRef>
-          <a:effectRef idx="2">
-            <a:schemeClr val="accent1"/>
-          </a:effectRef>
-          <a:fontRef idx="minor">
-            <a:schemeClr val="lt1"/>
-          </a:fontRef>
-        </p:style>
-        <p:txBody>
-          <a:bodyPr rtlCol="0" anchor="ctr" wrap="square"/>
-          <a:lstStyle/>
-          <a:p>
-            <a:pPr algn="ctr"/>
-          </a:p>
-        </p:txBody>
-      </p:sp>
-      <p:sp>
-        <p:nvSpPr>
-          <p:cNvPr id="21" name="Rectangle 20"/>
-          <p:cNvSpPr/>
-          <p:nvPr/>
-        </p:nvSpPr>
-        <p:spPr>
-          <a:xfrm>
-            <a:off x="10195560" y="1956816"/>
-            <a:ext cx="15875" cy="73152"/>
-          </a:xfrm>
-          <a:prstGeom prst="rect">
-            <a:avLst/>
-          </a:prstGeom>
-          <a:solidFill>
-            <a:srgbClr val="1C4FD8"/>
-          </a:solidFill>
-          <a:ln>
-            <a:noFill/>
-          </a:ln>
-          <a:effectLst/>
-        </p:spPr>
-        <p:style>
-          <a:lnRef idx="1">
-            <a:schemeClr val="accent1"/>
-          </a:lnRef>
-          <a:fillRef idx="3">
-            <a:schemeClr val="accent1"/>
-          </a:fillRef>
-          <a:effectRef idx="2">
-            <a:schemeClr val="accent1"/>
-          </a:effectRef>
-          <a:fontRef idx="minor">
-            <a:schemeClr val="lt1"/>
-          </a:fontRef>
-        </p:style>
-        <p:txBody>
-          <a:bodyPr rtlCol="0" anchor="ctr" wrap="square"/>
-          <a:lstStyle/>
-          <a:p>
-            <a:pPr algn="ctr"/>
-          </a:p>
-        </p:txBody>
-      </p:sp>
-      <p:sp>
-        <p:nvSpPr>
-          <p:cNvPr id="22" name="Down Arrow 21"/>
-          <p:cNvSpPr/>
-          <p:nvPr/>
-        </p:nvSpPr>
-        <p:spPr>
-          <a:xfrm>
-            <a:off x="7123176" y="2029968"/>
-            <a:ext cx="128016" cy="182880"/>
+            <a:off x="8412480" y="2258568"/>
+            <a:ext cx="128016" cy="237744"/>
           </a:xfrm>
           <a:prstGeom prst="downArrow">
             <a:avLst/>
@@ -12294,58 +10783,14 @@
       </p:sp>
       <p:sp>
         <p:nvSpPr>
-          <p:cNvPr id="23" name="Down Arrow 22"/>
+          <p:cNvPr id="16" name="Rectangle 15"/>
           <p:cNvSpPr/>
           <p:nvPr/>
         </p:nvSpPr>
         <p:spPr>
           <a:xfrm>
-            <a:off x="9454895" y="2029968"/>
-            <a:ext cx="128016" cy="182880"/>
-          </a:xfrm>
-          <a:prstGeom prst="downArrow">
-            <a:avLst/>
-          </a:prstGeom>
-          <a:solidFill>
-            <a:srgbClr val="1C4FD8"/>
-          </a:solidFill>
-          <a:ln>
-            <a:noFill/>
-          </a:ln>
-          <a:effectLst/>
-        </p:spPr>
-        <p:style>
-          <a:lnRef idx="1">
-            <a:schemeClr val="accent1"/>
-          </a:lnRef>
-          <a:fillRef idx="3">
-            <a:schemeClr val="accent1"/>
-          </a:fillRef>
-          <a:effectRef idx="2">
-            <a:schemeClr val="accent1"/>
-          </a:effectRef>
-          <a:fontRef idx="minor">
-            <a:schemeClr val="lt1"/>
-          </a:fontRef>
-        </p:style>
-        <p:txBody>
-          <a:bodyPr rtlCol="0" anchor="ctr"/>
-          <a:lstStyle/>
-          <a:p>
-            <a:pPr algn="ctr"/>
-          </a:p>
-        </p:txBody>
-      </p:sp>
-      <p:sp>
-        <p:nvSpPr>
-          <p:cNvPr id="24" name="Rectangle 23"/>
-          <p:cNvSpPr/>
-          <p:nvPr/>
-        </p:nvSpPr>
-        <p:spPr>
-          <a:xfrm>
-            <a:off x="6272784" y="2249424"/>
-            <a:ext cx="1828800" cy="402336"/>
+            <a:off x="7333488" y="2551176"/>
+            <a:ext cx="2157984" cy="457200"/>
           </a:xfrm>
           <a:prstGeom prst="rect">
             <a:avLst/>
@@ -12387,13 +10832,13 @@
               </a:spcAft>
             </a:pPr>
             <a:r>
-              <a:rPr sz="1000" b="1">
+              <a:rPr sz="1100" b="1">
                 <a:solidFill>
                   <a:srgbClr val="131A24"/>
                 </a:solidFill>
                 <a:latin typeface="Calibri"/>
               </a:rPr>
-              <a:t>Postgres</a:t>
+              <a:t>Every patent's progress is tracked</a:t>
             </a:r>
           </a:p>
           <a:p>
@@ -12412,143 +10857,20 @@
                 </a:solidFill>
                 <a:latin typeface="Consolas"/>
               </a:rPr>
-              <a:t>ingestion_jobs</a:t>
-            </a:r>
-          </a:p>
-        </p:txBody>
-      </p:sp>
-      <p:sp>
-        <p:nvSpPr>
-          <p:cNvPr id="25" name="Rectangle 24"/>
+              <a:t>so nothing is lost</a:t>
+            </a:r>
+          </a:p>
+        </p:txBody>
+      </p:sp>
+      <p:sp>
+        <p:nvSpPr>
+          <p:cNvPr id="17" name="Rectangle 16"/>
           <p:cNvSpPr/>
           <p:nvPr/>
         </p:nvSpPr>
         <p:spPr>
           <a:xfrm>
-            <a:off x="8494776" y="2249424"/>
-            <a:ext cx="1965960" cy="402336"/>
-          </a:xfrm>
-          <a:prstGeom prst="rect">
-            <a:avLst/>
-          </a:prstGeom>
-          <a:solidFill>
-            <a:srgbClr val="E6ECFD"/>
-          </a:solidFill>
-          <a:ln w="9525">
-            <a:solidFill>
-              <a:srgbClr val="1C4FD8"/>
-            </a:solidFill>
-          </a:ln>
-          <a:effectLst/>
-        </p:spPr>
-        <p:style>
-          <a:lnRef idx="1">
-            <a:schemeClr val="accent1"/>
-          </a:lnRef>
-          <a:fillRef idx="3">
-            <a:schemeClr val="accent1"/>
-          </a:fillRef>
-          <a:effectRef idx="2">
-            <a:schemeClr val="accent1"/>
-          </a:effectRef>
-          <a:fontRef idx="minor">
-            <a:schemeClr val="lt1"/>
-          </a:fontRef>
-        </p:style>
-        <p:txBody>
-          <a:bodyPr rtlCol="0" anchor="ctr" wrap="square" rIns="54864" tIns="0" bIns="0"/>
-          <a:lstStyle/>
-          <a:p>
-            <a:pPr algn="ctr">
-              <a:spcBef>
-                <a:spcPts val="0"/>
-              </a:spcBef>
-              <a:spcAft>
-                <a:spcPts val="0"/>
-              </a:spcAft>
-            </a:pPr>
-            <a:r>
-              <a:rPr sz="1000" b="1">
-                <a:solidFill>
-                  <a:srgbClr val="131A24"/>
-                </a:solidFill>
-                <a:latin typeface="Calibri"/>
-              </a:rPr>
-              <a:t>OpenSearch</a:t>
-            </a:r>
-          </a:p>
-          <a:p>
-            <a:pPr algn="ctr">
-              <a:spcBef>
-                <a:spcPts val="0"/>
-              </a:spcBef>
-              <a:spcAft>
-                <a:spcPts val="0"/>
-              </a:spcAft>
-            </a:pPr>
-            <a:r>
-              <a:rPr sz="900" b="0">
-                <a:solidFill>
-                  <a:srgbClr val="61707F"/>
-                </a:solidFill>
-                <a:latin typeface="Consolas"/>
-              </a:rPr>
-              <a:t>sharded</a:t>
-            </a:r>
-          </a:p>
-        </p:txBody>
-      </p:sp>
-      <p:sp>
-        <p:nvSpPr>
-          <p:cNvPr id="26" name="TextBox 25"/>
-          <p:cNvSpPr txBox="1"/>
-          <p:nvPr/>
-        </p:nvSpPr>
-        <p:spPr>
-          <a:xfrm>
-            <a:off x="6272784" y="2688336"/>
-            <a:ext cx="4206240" cy="182880"/>
-          </a:xfrm>
-          <a:prstGeom prst="rect">
-            <a:avLst/>
-          </a:prstGeom>
-          <a:noFill/>
-        </p:spPr>
-        <p:txBody>
-          <a:bodyPr wrap="square" anchor="t" lIns="0" rIns="0" tIns="0" bIns="0">
-            <a:spAutoFit/>
-          </a:bodyPr>
-          <a:lstStyle/>
-          <a:p>
-            <a:pPr algn="l">
-              <a:spcBef>
-                <a:spcPts val="0"/>
-              </a:spcBef>
-              <a:spcAft>
-                <a:spcPts val="0"/>
-              </a:spcAft>
-            </a:pPr>
-            <a:r>
-              <a:rPr sz="800" b="0">
-                <a:solidFill>
-                  <a:srgbClr val="61707F"/>
-                </a:solidFill>
-                <a:latin typeface="Consolas"/>
-              </a:rPr>
-              <a:t>status writes                          indexed records</a:t>
-            </a:r>
-          </a:p>
-        </p:txBody>
-      </p:sp>
-      <p:sp>
-        <p:nvSpPr>
-          <p:cNvPr id="27" name="Rectangle 26"/>
-          <p:cNvSpPr/>
-          <p:nvPr/>
-        </p:nvSpPr>
-        <p:spPr>
-          <a:xfrm>
-            <a:off x="566928" y="2980944"/>
+            <a:off x="566928" y="3191256"/>
             <a:ext cx="31750" cy="786384"/>
           </a:xfrm>
           <a:prstGeom prst="rect">
@@ -12586,13 +10908,13 @@
       </p:sp>
       <p:sp>
         <p:nvSpPr>
-          <p:cNvPr id="28" name="TextBox 27"/>
+          <p:cNvPr id="18" name="TextBox 17"/>
           <p:cNvSpPr txBox="1"/>
           <p:nvPr/>
         </p:nvSpPr>
         <p:spPr>
           <a:xfrm>
-            <a:off x="676656" y="2980944"/>
+            <a:off x="676656" y="3191256"/>
             <a:ext cx="3393338" cy="786384"/>
           </a:xfrm>
           <a:prstGeom prst="rect">
@@ -12650,13 +10972,13 @@
       </p:sp>
       <p:sp>
         <p:nvSpPr>
-          <p:cNvPr id="29" name="Rectangle 28"/>
+          <p:cNvPr id="19" name="Rectangle 18"/>
           <p:cNvSpPr/>
           <p:nvPr/>
         </p:nvSpPr>
         <p:spPr>
           <a:xfrm>
-            <a:off x="4344314" y="2980944"/>
+            <a:off x="4344314" y="3191256"/>
             <a:ext cx="31750" cy="786384"/>
           </a:xfrm>
           <a:prstGeom prst="rect">
@@ -12694,13 +11016,13 @@
       </p:sp>
       <p:sp>
         <p:nvSpPr>
-          <p:cNvPr id="30" name="TextBox 29"/>
+          <p:cNvPr id="20" name="TextBox 19"/>
           <p:cNvSpPr txBox="1"/>
           <p:nvPr/>
         </p:nvSpPr>
         <p:spPr>
           <a:xfrm>
-            <a:off x="4454042" y="2980944"/>
+            <a:off x="4454042" y="3191256"/>
             <a:ext cx="3393338" cy="786384"/>
           </a:xfrm>
           <a:prstGeom prst="rect">
@@ -12758,13 +11080,13 @@
       </p:sp>
       <p:sp>
         <p:nvSpPr>
-          <p:cNvPr id="31" name="Rectangle 30"/>
+          <p:cNvPr id="21" name="Rectangle 20"/>
           <p:cNvSpPr/>
           <p:nvPr/>
         </p:nvSpPr>
         <p:spPr>
           <a:xfrm>
-            <a:off x="8121700" y="2980944"/>
+            <a:off x="8121700" y="3191256"/>
             <a:ext cx="31750" cy="786384"/>
           </a:xfrm>
           <a:prstGeom prst="rect">
@@ -12802,13 +11124,13 @@
       </p:sp>
       <p:sp>
         <p:nvSpPr>
-          <p:cNvPr id="32" name="TextBox 31"/>
+          <p:cNvPr id="22" name="TextBox 21"/>
           <p:cNvSpPr txBox="1"/>
           <p:nvPr/>
         </p:nvSpPr>
         <p:spPr>
           <a:xfrm>
-            <a:off x="8231428" y="2980944"/>
+            <a:off x="8231428" y="3191256"/>
             <a:ext cx="3393338" cy="786384"/>
           </a:xfrm>
           <a:prstGeom prst="rect">
@@ -12866,14 +11188,14 @@
       </p:sp>
       <p:sp>
         <p:nvSpPr>
-          <p:cNvPr id="33" name="TextBox 32"/>
+          <p:cNvPr id="23" name="TextBox 22"/>
           <p:cNvSpPr txBox="1"/>
           <p:nvPr/>
         </p:nvSpPr>
         <p:spPr>
           <a:xfrm>
-            <a:off x="566928" y="3895344"/>
-            <a:ext cx="5391759" cy="1188720"/>
+            <a:off x="566928" y="4105656"/>
+            <a:ext cx="5368899" cy="1280160"/>
           </a:xfrm>
           <a:prstGeom prst="rect">
             <a:avLst/>
@@ -12891,348 +11213,19 @@
                 <a:spcPts val="0"/>
               </a:spcBef>
               <a:spcAft>
-                <a:spcPts val="500"/>
+                <a:spcPts val="700"/>
               </a:spcAft>
             </a:pPr>
             <a:r>
-              <a:rPr sz="1250" b="1">
+              <a:rPr sz="1400" b="1">
                 <a:solidFill>
                   <a:srgbClr val="131A24"/>
                 </a:solidFill>
                 <a:latin typeface="Calibri"/>
               </a:rPr>
-              <a:t>Vector storage dominates — attack it first</a:t>
-            </a:r>
-          </a:p>
-          <a:p>
-            <a:pPr algn="l">
-              <a:lnSpc>
-                <a:spcPct val="115000"/>
-              </a:lnSpc>
-              <a:spcBef>
-                <a:spcPts val="0"/>
-              </a:spcBef>
-              <a:spcAft>
-                <a:spcPts val="300"/>
-              </a:spcAft>
-            </a:pPr>
-            <a:r>
-              <a:rPr sz="1100" b="0">
-                <a:solidFill>
-                  <a:srgbClr val="35424F"/>
-                </a:solidFill>
-                <a:latin typeface="Calibri"/>
-              </a:rPr>
-              <a:t>— 293M × 1536 dims × 4 bytes = 1.8 TB, and HNSW wants it resident</a:t>
-            </a:r>
-          </a:p>
-          <a:p>
-            <a:pPr algn="l">
-              <a:lnSpc>
-                <a:spcPct val="115000"/>
-              </a:lnSpc>
-              <a:spcBef>
-                <a:spcPts val="0"/>
-              </a:spcBef>
-              <a:spcAft>
-                <a:spcPts val="300"/>
-              </a:spcAft>
-            </a:pPr>
-            <a:r>
-              <a:rPr sz="1100" b="0">
-                <a:solidFill>
-                  <a:srgbClr val="35424F"/>
-                </a:solidFill>
-                <a:latin typeface="Calibri"/>
-              </a:rPr>
-              <a:t>— Truncate to 512 dims (Matryoshka) -&gt; 600 GB</a:t>
-            </a:r>
-          </a:p>
-          <a:p>
-            <a:pPr algn="l">
-              <a:lnSpc>
-                <a:spcPct val="115000"/>
-              </a:lnSpc>
-              <a:spcBef>
-                <a:spcPts val="0"/>
-              </a:spcBef>
-              <a:spcAft>
-                <a:spcPts val="300"/>
-              </a:spcAft>
-            </a:pPr>
-            <a:r>
-              <a:rPr sz="1100" b="0">
-                <a:solidFill>
-                  <a:srgbClr val="35424F"/>
-                </a:solidFill>
-                <a:latin typeface="Calibri"/>
-              </a:rPr>
-              <a:t>— Quantise to int8 -&gt; 150 GB</a:t>
-            </a:r>
-          </a:p>
-          <a:p>
-            <a:pPr algn="l">
-              <a:lnSpc>
-                <a:spcPct val="115000"/>
-              </a:lnSpc>
-              <a:spcBef>
-                <a:spcPts val="0"/>
-              </a:spcBef>
-              <a:spcAft>
-                <a:spcPts val="300"/>
-              </a:spcAft>
-            </a:pPr>
-            <a:r>
-              <a:rPr sz="1100" b="0">
-                <a:solidFill>
-                  <a:srgbClr val="35424F"/>
-                </a:solidFill>
-                <a:latin typeface="Calibri"/>
-              </a:rPr>
-              <a:t>— Skip description passages — 38% of records, least queried</a:t>
-            </a:r>
-          </a:p>
-        </p:txBody>
-      </p:sp>
-      <p:sp>
-        <p:nvSpPr>
-          <p:cNvPr id="34" name="TextBox 33"/>
-          <p:cNvSpPr txBox="1"/>
-          <p:nvPr/>
-        </p:nvSpPr>
-        <p:spPr>
-          <a:xfrm>
-            <a:off x="6233007" y="3895344"/>
-            <a:ext cx="5391759" cy="1188720"/>
-          </a:xfrm>
-          <a:prstGeom prst="rect">
-            <a:avLst/>
-          </a:prstGeom>
-          <a:noFill/>
-        </p:spPr>
-        <p:txBody>
-          <a:bodyPr wrap="square" anchor="t" lIns="0" rIns="0" tIns="0" bIns="0">
-            <a:spAutoFit/>
-          </a:bodyPr>
-          <a:lstStyle/>
-          <a:p>
-            <a:pPr algn="l">
-              <a:spcBef>
-                <a:spcPts val="0"/>
-              </a:spcBef>
-              <a:spcAft>
-                <a:spcPts val="500"/>
-              </a:spcAft>
-            </a:pPr>
-            <a:r>
-              <a:rPr sz="1250" b="1">
-                <a:solidFill>
-                  <a:srgbClr val="131A24"/>
-                </a:solidFill>
-                <a:latin typeface="Calibri"/>
-              </a:rPr>
-              <a:t>Proof of concept, on all 640 patents</a:t>
-            </a:r>
-          </a:p>
-          <a:p>
-            <a:pPr algn="l">
-              <a:lnSpc>
-                <a:spcPct val="115000"/>
-              </a:lnSpc>
-              <a:spcBef>
-                <a:spcPts val="0"/>
-              </a:spcBef>
-              <a:spcAft>
-                <a:spcPts val="300"/>
-              </a:spcAft>
-            </a:pPr>
-            <a:r>
-              <a:rPr sz="1100" b="0">
-                <a:solidFill>
-                  <a:srgbClr val="35424F"/>
-                </a:solidFill>
-                <a:latin typeface="Calibri"/>
-              </a:rPr>
-              <a:t>— Idempotent — re-running enqueues 0, skips 640</a:t>
-            </a:r>
-          </a:p>
-          <a:p>
-            <a:pPr algn="l">
-              <a:lnSpc>
-                <a:spcPct val="115000"/>
-              </a:lnSpc>
-              <a:spcBef>
-                <a:spcPts val="0"/>
-              </a:spcBef>
-              <a:spcAft>
-                <a:spcPts val="300"/>
-              </a:spcAft>
-            </a:pPr>
-            <a:r>
-              <a:rPr sz="1100" b="0">
-                <a:solidFill>
-                  <a:srgbClr val="35424F"/>
-                </a:solidFill>
-                <a:latin typeface="Calibri"/>
-              </a:rPr>
-              <a:t>— Versioned — bumping parser version re-queues all 640</a:t>
-            </a:r>
-          </a:p>
-          <a:p>
-            <a:pPr algn="l">
-              <a:lnSpc>
-                <a:spcPct val="115000"/>
-              </a:lnSpc>
-              <a:spcBef>
-                <a:spcPts val="0"/>
-              </a:spcBef>
-              <a:spcAft>
-                <a:spcPts val="300"/>
-              </a:spcAft>
-            </a:pPr>
-            <a:r>
-              <a:rPr sz="1100" b="0">
-                <a:solidFill>
-                  <a:srgbClr val="35424F"/>
-                </a:solidFill>
-                <a:latin typeface="Calibri"/>
-              </a:rPr>
-              <a:t>— Crash-safe — expired leases return to PENDING</a:t>
-            </a:r>
-          </a:p>
-          <a:p>
-            <a:pPr algn="l">
-              <a:lnSpc>
-                <a:spcPct val="115000"/>
-              </a:lnSpc>
-              <a:spcBef>
-                <a:spcPts val="0"/>
-              </a:spcBef>
-              <a:spcAft>
-                <a:spcPts val="300"/>
-              </a:spcAft>
-            </a:pPr>
-            <a:r>
-              <a:rPr sz="1100" b="0">
-                <a:solidFill>
-                  <a:srgbClr val="35424F"/>
-                </a:solidFill>
-                <a:latin typeface="Calibri"/>
-              </a:rPr>
-              <a:t>— Retry-tracked — failures record the error and count</a:t>
-            </a:r>
-          </a:p>
-        </p:txBody>
-      </p:sp>
-      <p:sp>
-        <p:nvSpPr>
-          <p:cNvPr id="35" name="Rectangle 34"/>
-          <p:cNvSpPr/>
-          <p:nvPr/>
-        </p:nvSpPr>
-        <p:spPr>
-          <a:xfrm>
-            <a:off x="566928" y="5193792"/>
-            <a:ext cx="11057839" cy="548640"/>
-          </a:xfrm>
-          <a:prstGeom prst="rect">
-            <a:avLst/>
-          </a:prstGeom>
-          <a:solidFill>
-            <a:srgbClr val="E6ECFD"/>
-          </a:solidFill>
-          <a:ln>
-            <a:noFill/>
-          </a:ln>
-          <a:effectLst/>
-        </p:spPr>
-        <p:style>
-          <a:lnRef idx="1">
-            <a:schemeClr val="accent1"/>
-          </a:lnRef>
-          <a:fillRef idx="3">
-            <a:schemeClr val="accent1"/>
-          </a:fillRef>
-          <a:effectRef idx="2">
-            <a:schemeClr val="accent1"/>
-          </a:effectRef>
-          <a:fontRef idx="minor">
-            <a:schemeClr val="lt1"/>
-          </a:fontRef>
-        </p:style>
-        <p:txBody>
-          <a:bodyPr rtlCol="0" anchor="ctr" wrap="square"/>
-          <a:lstStyle/>
-          <a:p>
-            <a:pPr algn="ctr"/>
-          </a:p>
-        </p:txBody>
-      </p:sp>
-      <p:sp>
-        <p:nvSpPr>
-          <p:cNvPr id="36" name="Rectangle 35"/>
-          <p:cNvSpPr/>
-          <p:nvPr/>
-        </p:nvSpPr>
-        <p:spPr>
-          <a:xfrm>
-            <a:off x="566928" y="5193792"/>
-            <a:ext cx="38100" cy="548640"/>
-          </a:xfrm>
-          <a:prstGeom prst="rect">
-            <a:avLst/>
-          </a:prstGeom>
-          <a:solidFill>
-            <a:srgbClr val="1C4FD8"/>
-          </a:solidFill>
-          <a:ln>
-            <a:noFill/>
-          </a:ln>
-          <a:effectLst/>
-        </p:spPr>
-        <p:style>
-          <a:lnRef idx="1">
-            <a:schemeClr val="accent1"/>
-          </a:lnRef>
-          <a:fillRef idx="3">
-            <a:schemeClr val="accent1"/>
-          </a:fillRef>
-          <a:effectRef idx="2">
-            <a:schemeClr val="accent1"/>
-          </a:effectRef>
-          <a:fontRef idx="minor">
-            <a:schemeClr val="lt1"/>
-          </a:fontRef>
-        </p:style>
-        <p:txBody>
-          <a:bodyPr rtlCol="0" anchor="ctr" wrap="square"/>
-          <a:lstStyle/>
-          <a:p>
-            <a:pPr algn="ctr"/>
-          </a:p>
-        </p:txBody>
-      </p:sp>
-      <p:sp>
-        <p:nvSpPr>
-          <p:cNvPr id="37" name="TextBox 36"/>
-          <p:cNvSpPr txBox="1"/>
-          <p:nvPr/>
-        </p:nvSpPr>
-        <p:spPr>
-          <a:xfrm>
-            <a:off x="713232" y="5303520"/>
-            <a:ext cx="10783519" cy="365760"/>
-          </a:xfrm>
-          <a:prstGeom prst="rect">
-            <a:avLst/>
-          </a:prstGeom>
-          <a:noFill/>
-        </p:spPr>
-        <p:txBody>
-          <a:bodyPr wrap="square" anchor="t" lIns="0" rIns="0" tIns="0" bIns="0">
-            <a:spAutoFit/>
-          </a:bodyPr>
-          <a:lstStyle/>
+              <a:t>Vector storage is the binding constraint</a:t>
+            </a:r>
+          </a:p>
           <a:p>
             <a:pPr algn="l">
               <a:lnSpc>
@@ -13242,17 +11235,213 @@
                 <a:spcPts val="0"/>
               </a:spcBef>
               <a:spcAft>
-                <a:spcPts val="0"/>
+                <a:spcPts val="400"/>
               </a:spcAft>
             </a:pPr>
             <a:r>
-              <a:rPr sz="1100" b="0">
+              <a:rPr sz="1250" b="0">
                 <a:solidFill>
                   <a:srgbClr val="35424F"/>
                 </a:solidFill>
                 <a:latin typeface="Calibri"/>
               </a:rPr>
-              <a:t>The filter finding inverts at scale: filters cost BM25 +69% here because at 18.7K records there is nothing to save. At 10M patents B60B selects ~0.3% of the corpus, and filtering becomes the dominant optimisation.</a:t>
+              <a:t>— 1.8 TB of vectors, and the index wants it in memory</a:t>
+            </a:r>
+          </a:p>
+          <a:p>
+            <a:pPr algn="l">
+              <a:lnSpc>
+                <a:spcPct val="120000"/>
+              </a:lnSpc>
+              <a:spcBef>
+                <a:spcPts val="0"/>
+              </a:spcBef>
+              <a:spcAft>
+                <a:spcPts val="400"/>
+              </a:spcAft>
+            </a:pPr>
+            <a:r>
+              <a:rPr sz="1250" b="0">
+                <a:solidFill>
+                  <a:srgbClr val="35424F"/>
+                </a:solidFill>
+                <a:latin typeface="Calibri"/>
+              </a:rPr>
+              <a:t>— Halve the dimensions -&gt; 600 GB</a:t>
+            </a:r>
+          </a:p>
+          <a:p>
+            <a:pPr algn="l">
+              <a:lnSpc>
+                <a:spcPct val="120000"/>
+              </a:lnSpc>
+              <a:spcBef>
+                <a:spcPts val="0"/>
+              </a:spcBef>
+              <a:spcAft>
+                <a:spcPts val="400"/>
+              </a:spcAft>
+            </a:pPr>
+            <a:r>
+              <a:rPr sz="1250" b="0">
+                <a:solidFill>
+                  <a:srgbClr val="35424F"/>
+                </a:solidFill>
+                <a:latin typeface="Calibri"/>
+              </a:rPr>
+              <a:t>— Compress to int8 -&gt; 150 GB</a:t>
+            </a:r>
+          </a:p>
+          <a:p>
+            <a:pPr algn="l">
+              <a:lnSpc>
+                <a:spcPct val="120000"/>
+              </a:lnSpc>
+              <a:spcBef>
+                <a:spcPts val="0"/>
+              </a:spcBef>
+              <a:spcAft>
+                <a:spcPts val="400"/>
+              </a:spcAft>
+            </a:pPr>
+            <a:r>
+              <a:rPr sz="1250" b="0">
+                <a:solidFill>
+                  <a:srgbClr val="35424F"/>
+                </a:solidFill>
+                <a:latin typeface="Calibri"/>
+              </a:rPr>
+              <a:t>— Skip description passages -&gt; a further 38% off</a:t>
+            </a:r>
+          </a:p>
+        </p:txBody>
+      </p:sp>
+      <p:sp>
+        <p:nvSpPr>
+          <p:cNvPr id="24" name="TextBox 23"/>
+          <p:cNvSpPr txBox="1"/>
+          <p:nvPr/>
+        </p:nvSpPr>
+        <p:spPr>
+          <a:xfrm>
+            <a:off x="6255867" y="4105656"/>
+            <a:ext cx="5368899" cy="1280160"/>
+          </a:xfrm>
+          <a:prstGeom prst="rect">
+            <a:avLst/>
+          </a:prstGeom>
+          <a:noFill/>
+        </p:spPr>
+        <p:txBody>
+          <a:bodyPr wrap="square" anchor="t" lIns="0" rIns="0" tIns="0" bIns="0">
+            <a:spAutoFit/>
+          </a:bodyPr>
+          <a:lstStyle/>
+          <a:p>
+            <a:pPr algn="l">
+              <a:spcBef>
+                <a:spcPts val="0"/>
+              </a:spcBef>
+              <a:spcAft>
+                <a:spcPts val="700"/>
+              </a:spcAft>
+            </a:pPr>
+            <a:r>
+              <a:rPr sz="1400" b="1">
+                <a:solidFill>
+                  <a:srgbClr val="131A24"/>
+                </a:solidFill>
+                <a:latin typeface="Calibri"/>
+              </a:rPr>
+              <a:t>Ingestion, proven on all 640 patents</a:t>
+            </a:r>
+          </a:p>
+          <a:p>
+            <a:pPr algn="l">
+              <a:lnSpc>
+                <a:spcPct val="120000"/>
+              </a:lnSpc>
+              <a:spcBef>
+                <a:spcPts val="0"/>
+              </a:spcBef>
+              <a:spcAft>
+                <a:spcPts val="400"/>
+              </a:spcAft>
+            </a:pPr>
+            <a:r>
+              <a:rPr sz="1250" b="0">
+                <a:solidFill>
+                  <a:srgbClr val="35424F"/>
+                </a:solidFill>
+                <a:latin typeface="Calibri"/>
+              </a:rPr>
+              <a:t>— Re-running ingests nothing</a:t>
+            </a:r>
+          </a:p>
+          <a:p>
+            <a:pPr algn="l">
+              <a:lnSpc>
+                <a:spcPct val="120000"/>
+              </a:lnSpc>
+              <a:spcBef>
+                <a:spcPts val="0"/>
+              </a:spcBef>
+              <a:spcAft>
+                <a:spcPts val="400"/>
+              </a:spcAft>
+            </a:pPr>
+            <a:r>
+              <a:rPr sz="1250" b="0">
+                <a:solidFill>
+                  <a:srgbClr val="35424F"/>
+                </a:solidFill>
+                <a:latin typeface="Calibri"/>
+              </a:rPr>
+              <a:t>— Version bump re-queues everything</a:t>
+            </a:r>
+          </a:p>
+          <a:p>
+            <a:pPr algn="l">
+              <a:lnSpc>
+                <a:spcPct val="120000"/>
+              </a:lnSpc>
+              <a:spcBef>
+                <a:spcPts val="0"/>
+              </a:spcBef>
+              <a:spcAft>
+                <a:spcPts val="400"/>
+              </a:spcAft>
+            </a:pPr>
+            <a:r>
+              <a:rPr sz="1250" b="0">
+                <a:solidFill>
+                  <a:srgbClr val="35424F"/>
+                </a:solidFill>
+                <a:latin typeface="Calibri"/>
+              </a:rPr>
+              <a:t>— A dead worker's jobs come back</a:t>
+            </a:r>
+          </a:p>
+          <a:p>
+            <a:pPr algn="l">
+              <a:lnSpc>
+                <a:spcPct val="120000"/>
+              </a:lnSpc>
+              <a:spcBef>
+                <a:spcPts val="0"/>
+              </a:spcBef>
+              <a:spcAft>
+                <a:spcPts val="400"/>
+              </a:spcAft>
+            </a:pPr>
+            <a:r>
+              <a:rPr sz="1250" b="0">
+                <a:solidFill>
+                  <a:srgbClr val="35424F"/>
+                </a:solidFill>
+                <a:latin typeface="Calibri"/>
+              </a:rPr>
+              <a:t>— Failures record the error and retry</a:t>
             </a:r>
           </a:p>
         </p:txBody>
